--- a/output/frentes_milestones.pptx
+++ b/output/frentes_milestones.pptx
@@ -3133,7 +3133,7 @@
         </p:nvGraphicFramePr>
         <p:xfrm>
           <a:off x="384048" y="274320"/>
-          <a:ext cx="11423874" cy="994791"/>
+          <a:ext cx="11423873" cy="994791"/>
         </p:xfrm>
         <a:graphic>
           <a:graphicData uri="http://schemas.openxmlformats.org/drawingml/2006/table">
@@ -3143,7 +3143,7 @@
               </a:tblPr>
               <a:tblGrid>
                 <a:gridCol w="68580"/>
-                <a:gridCol w="6966174"/>
+                <a:gridCol w="6966173"/>
                 <a:gridCol w="1737360"/>
                 <a:gridCol w="2651760"/>
               </a:tblGrid>
@@ -3179,7 +3179,7 @@
                     <a:p>
                       <a:pPr algn="l"/>
                       <a:r>
-                        <a:rPr sz="1500" b="1" i="0">
+                        <a:rPr sz="1500" b="1" i="0" lang="pt-BR">
                           <a:solidFill>
                             <a:srgbClr val="1A1A1A"/>
                           </a:solidFill>
@@ -3195,7 +3195,7 @@
                         </a:spcBef>
                       </a:pPr>
                       <a:r>
-                        <a:rPr sz="1050" b="0" i="0">
+                        <a:rPr sz="1050" b="0" i="0" lang="pt-BR">
                           <a:solidFill>
                             <a:srgbClr val="6B6B6B"/>
                           </a:solidFill>
@@ -3204,7 +3204,7 @@
                         <a:t>Aprimorar o </a:t>
                       </a:r>
                       <a:r>
-                        <a:rPr sz="1050" b="1" i="0">
+                        <a:rPr sz="1050" b="1" i="0" lang="pt-BR">
                           <a:solidFill>
                             <a:srgbClr val="6B6B6B"/>
                           </a:solidFill>
@@ -3213,7 +3213,7 @@
                         <a:t>planejamento integrado e colaborativo entre marketing e vendas</a:t>
                       </a:r>
                       <a:r>
-                        <a:rPr sz="1050" b="0" i="0">
+                        <a:rPr sz="1050" b="0" i="0" lang="pt-BR">
                           <a:solidFill>
                             <a:srgbClr val="6B6B6B"/>
                           </a:solidFill>
@@ -3222,7 +3222,7 @@
                         <a:t> para dimensionar a </a:t>
                       </a:r>
                       <a:r>
-                        <a:rPr sz="1050" b="1" i="0">
+                        <a:rPr sz="1050" b="1" i="0" lang="pt-BR">
                           <a:solidFill>
                             <a:srgbClr val="6B6B6B"/>
                           </a:solidFill>
@@ -3231,7 +3231,7 @@
                         <a:t>necessidade de vendas de curto prazo</a:t>
                       </a:r>
                       <a:r>
-                        <a:rPr sz="1050" b="0" i="0">
+                        <a:rPr sz="1050" b="0" i="0" lang="pt-BR">
                           <a:solidFill>
                             <a:srgbClr val="6B6B6B"/>
                           </a:solidFill>
@@ -3240,7 +3240,7 @@
                         <a:t>, desdobrando-a em </a:t>
                       </a:r>
                       <a:r>
-                        <a:rPr sz="1050" b="1" i="0">
+                        <a:rPr sz="1050" b="1" i="0" lang="pt-BR">
                           <a:solidFill>
                             <a:srgbClr val="6B6B6B"/>
                           </a:solidFill>
@@ -3249,7 +3249,7 @@
                         <a:t>planos de geração de leads</a:t>
                       </a:r>
                       <a:r>
-                        <a:rPr sz="1050" b="0" i="0">
+                        <a:rPr sz="1050" b="0" i="0" lang="pt-BR">
                           <a:solidFill>
                             <a:srgbClr val="6B6B6B"/>
                           </a:solidFill>
@@ -3258,7 +3258,7 @@
                         <a:t> e </a:t>
                       </a:r>
                       <a:r>
-                        <a:rPr sz="1050" b="1" i="0">
+                        <a:rPr sz="1050" b="1" i="0" lang="pt-BR">
                           <a:solidFill>
                             <a:srgbClr val="6B6B6B"/>
                           </a:solidFill>
@@ -3267,7 +3267,7 @@
                         <a:t>planos comerciais de conversão</a:t>
                       </a:r>
                       <a:r>
-                        <a:rPr sz="1050" b="0" i="0">
+                        <a:rPr sz="1050" b="0" i="0" lang="pt-BR">
                           <a:solidFill>
                             <a:srgbClr val="6B6B6B"/>
                           </a:solidFill>
@@ -3276,7 +3276,7 @@
                         <a:t>, com </a:t>
                       </a:r>
                       <a:r>
-                        <a:rPr sz="1050" b="1" i="0">
+                        <a:rPr sz="1050" b="1" i="0" lang="pt-BR">
                           <a:solidFill>
                             <a:srgbClr val="6B6B6B"/>
                           </a:solidFill>
@@ -3285,7 +3285,7 @@
                         <a:t>ambições compartilhadas</a:t>
                       </a:r>
                       <a:r>
-                        <a:rPr sz="1050" b="0" i="0">
+                        <a:rPr sz="1050" b="0" i="0" lang="pt-BR">
                           <a:solidFill>
                             <a:srgbClr val="6B6B6B"/>
                           </a:solidFill>
@@ -3320,7 +3320,7 @@
                     <a:p>
                       <a:pPr algn="l"/>
                       <a:r>
-                        <a:rPr sz="800" b="1" i="0">
+                        <a:rPr sz="800" b="1" i="0" lang="pt-BR">
                           <a:solidFill>
                             <a:srgbClr val="757575"/>
                           </a:solidFill>
@@ -3336,7 +3336,7 @@
                         </a:spcBef>
                       </a:pPr>
                       <a:r>
-                        <a:rPr sz="1000" b="0" i="0">
+                        <a:rPr sz="1000" b="0" i="0" lang="pt-BR">
                           <a:solidFill>
                             <a:srgbClr val="333333"/>
                           </a:solidFill>
@@ -3371,7 +3371,7 @@
                     <a:p>
                       <a:pPr algn="l"/>
                       <a:r>
-                        <a:rPr sz="800" b="1" i="0">
+                        <a:rPr sz="800" b="1" i="0" lang="pt-BR">
                           <a:solidFill>
                             <a:srgbClr val="757575"/>
                           </a:solidFill>
@@ -3387,7 +3387,7 @@
                         </a:spcBef>
                       </a:pPr>
                       <a:r>
-                        <a:rPr sz="1000" b="0" i="0">
+                        <a:rPr sz="1000" b="0" i="0" lang="pt-BR">
                           <a:solidFill>
                             <a:srgbClr val="333333"/>
                           </a:solidFill>
@@ -3446,7 +3446,7 @@
           <a:p>
             <a:pPr algn="l"/>
             <a:r>
-              <a:rPr sz="900" b="0" i="0">
+              <a:rPr sz="900" b="0" i="0" lang="pt-BR">
                 <a:solidFill>
                   <a:srgbClr val="333333"/>
                 </a:solidFill>
@@ -3455,7 +3455,7 @@
               <a:t/>
             </a:r>
             <a:r>
-              <a:rPr sz="900" b="1" i="0">
+              <a:rPr sz="900" b="1" i="0" lang="pt-BR">
                 <a:solidFill>
                   <a:srgbClr val="3F7C0E"/>
                 </a:solidFill>
@@ -3492,7 +3492,7 @@
           <a:p>
             <a:pPr algn="l"/>
             <a:r>
-              <a:rPr sz="900" b="0" i="0">
+              <a:rPr sz="900" b="0" i="0" lang="pt-BR">
                 <a:solidFill>
                   <a:srgbClr val="333333"/>
                 </a:solidFill>
@@ -3501,7 +3501,7 @@
               <a:t/>
             </a:r>
             <a:r>
-              <a:rPr sz="900" b="1" i="0">
+              <a:rPr sz="900" b="1" i="0" lang="pt-BR">
                 <a:solidFill>
                   <a:srgbClr val="4A4A4A"/>
                 </a:solidFill>
@@ -3538,7 +3538,7 @@
           <a:p>
             <a:pPr algn="l"/>
             <a:r>
-              <a:rPr sz="900" b="0" i="0">
+              <a:rPr sz="900" b="0" i="0" lang="pt-BR">
                 <a:solidFill>
                   <a:srgbClr val="333333"/>
                 </a:solidFill>
@@ -3547,7 +3547,7 @@
               <a:t/>
             </a:r>
             <a:r>
-              <a:rPr sz="900" b="1" i="0">
+              <a:rPr sz="900" b="1" i="0" lang="pt-BR">
                 <a:solidFill>
                   <a:srgbClr val="4A4A4A"/>
                 </a:solidFill>
@@ -3584,7 +3584,7 @@
           <a:p>
             <a:pPr algn="l"/>
             <a:r>
-              <a:rPr sz="900" b="0" i="0">
+              <a:rPr sz="900" b="0" i="0" lang="pt-BR">
                 <a:solidFill>
                   <a:srgbClr val="333333"/>
                 </a:solidFill>
@@ -3593,7 +3593,7 @@
               <a:t/>
             </a:r>
             <a:r>
-              <a:rPr sz="900" b="1" i="0">
+              <a:rPr sz="900" b="1" i="0" lang="pt-BR">
                 <a:solidFill>
                   <a:srgbClr val="4A4A4A"/>
                 </a:solidFill>
@@ -3630,7 +3630,7 @@
           <a:p>
             <a:pPr algn="l"/>
             <a:r>
-              <a:rPr sz="900" b="0" i="0">
+              <a:rPr sz="900" b="0" i="0" lang="pt-BR">
                 <a:solidFill>
                   <a:srgbClr val="333333"/>
                 </a:solidFill>
@@ -3639,7 +3639,7 @@
               <a:t/>
             </a:r>
             <a:r>
-              <a:rPr sz="900" b="1" i="0">
+              <a:rPr sz="900" b="1" i="0" lang="pt-BR">
                 <a:solidFill>
                   <a:srgbClr val="4A4A4A"/>
                 </a:solidFill>
@@ -3676,7 +3676,7 @@
           <a:p>
             <a:pPr algn="l"/>
             <a:r>
-              <a:rPr sz="900" b="0" i="0">
+              <a:rPr sz="900" b="0" i="0" lang="pt-BR">
                 <a:solidFill>
                   <a:srgbClr val="333333"/>
                 </a:solidFill>
@@ -3685,7 +3685,7 @@
               <a:t/>
             </a:r>
             <a:r>
-              <a:rPr sz="900" b="1" i="0">
+              <a:rPr sz="900" b="1" i="0" lang="pt-BR">
                 <a:solidFill>
                   <a:srgbClr val="4A4A4A"/>
                 </a:solidFill>
@@ -3720,7 +3720,7 @@
           <a:p>
             <a:pPr algn="l"/>
             <a:r>
-              <a:rPr sz="1150" b="1" i="0">
+              <a:rPr sz="1150" b="1" i="0" lang="pt-BR">
                 <a:solidFill>
                   <a:srgbClr val="1A1A1A"/>
                 </a:solidFill>
@@ -3741,7 +3741,7 @@
         </p:nvGraphicFramePr>
         <p:xfrm>
           <a:off x="384048" y="1979930"/>
-          <a:ext cx="11423874" cy="4512312"/>
+          <a:ext cx="11423870" cy="4512312"/>
         </p:xfrm>
         <a:graphic>
           <a:graphicData uri="http://schemas.openxmlformats.org/drawingml/2006/table">
@@ -3751,10 +3751,10 @@
               </a:tblPr>
               <a:tblGrid>
                 <a:gridCol w="567532"/>
-                <a:gridCol w="3020736"/>
-                <a:gridCol w="1299832"/>
-                <a:gridCol w="869606"/>
-                <a:gridCol w="1052681"/>
+                <a:gridCol w="3020735"/>
+                <a:gridCol w="1299831"/>
+                <a:gridCol w="869605"/>
+                <a:gridCol w="1052680"/>
                 <a:gridCol w="1537829"/>
                 <a:gridCol w="1537829"/>
                 <a:gridCol w="1537829"/>
@@ -3767,7 +3767,7 @@
                     <a:p>
                       <a:pPr algn="l"/>
                       <a:r>
-                        <a:rPr sz="900" b="1" i="0">
+                        <a:rPr sz="900" b="1" i="0" lang="pt-BR">
                           <a:solidFill>
                             <a:srgbClr val="757575"/>
                           </a:solidFill>
@@ -3802,7 +3802,7 @@
                     <a:p>
                       <a:pPr algn="l"/>
                       <a:r>
-                        <a:rPr sz="900" b="1" i="0">
+                        <a:rPr sz="900" b="1" i="0" lang="pt-BR">
                           <a:solidFill>
                             <a:srgbClr val="757575"/>
                           </a:solidFill>
@@ -3837,7 +3837,7 @@
                     <a:p>
                       <a:pPr algn="l"/>
                       <a:r>
-                        <a:rPr sz="900" b="1" i="0">
+                        <a:rPr sz="900" b="1" i="0" lang="pt-BR">
                           <a:solidFill>
                             <a:srgbClr val="757575"/>
                           </a:solidFill>
@@ -3872,7 +3872,7 @@
                     <a:p>
                       <a:pPr algn="l"/>
                       <a:r>
-                        <a:rPr sz="900" b="1" i="0">
+                        <a:rPr sz="900" b="1" i="0" lang="pt-BR">
                           <a:solidFill>
                             <a:srgbClr val="757575"/>
                           </a:solidFill>
@@ -3907,7 +3907,7 @@
                     <a:p>
                       <a:pPr algn="ctr"/>
                       <a:r>
-                        <a:rPr sz="900" b="1" i="0">
+                        <a:rPr sz="900" b="1" i="0" lang="pt-BR">
                           <a:solidFill>
                             <a:srgbClr val="757575"/>
                           </a:solidFill>
@@ -3942,7 +3942,7 @@
                     <a:p>
                       <a:pPr algn="l"/>
                       <a:r>
-                        <a:rPr sz="900" b="1" i="0">
+                        <a:rPr sz="900" b="1" i="0" lang="pt-BR">
                           <a:solidFill>
                             <a:srgbClr val="757575"/>
                           </a:solidFill>
@@ -3977,7 +3977,7 @@
                     <a:p>
                       <a:pPr algn="l"/>
                       <a:r>
-                        <a:rPr sz="900" b="1" i="0">
+                        <a:rPr sz="900" b="1" i="0" lang="pt-BR">
                           <a:solidFill>
                             <a:srgbClr val="757575"/>
                           </a:solidFill>
@@ -4012,7 +4012,7 @@
                     <a:p>
                       <a:pPr algn="l"/>
                       <a:r>
-                        <a:rPr sz="900" b="1" i="0">
+                        <a:rPr sz="900" b="1" i="0" lang="pt-BR">
                           <a:solidFill>
                             <a:srgbClr val="757575"/>
                           </a:solidFill>
@@ -4049,7 +4049,7 @@
                     <a:p>
                       <a:pPr algn="l"/>
                       <a:r>
-                        <a:rPr sz="950" b="1" i="0">
+                        <a:rPr sz="950" b="1" i="0" lang="pt-BR">
                           <a:solidFill>
                             <a:srgbClr val="757575"/>
                           </a:solidFill>
@@ -4084,7 +4084,7 @@
                     <a:p>
                       <a:pPr algn="l"/>
                       <a:r>
-                        <a:rPr sz="1000" b="1" i="0">
+                        <a:rPr sz="1000" b="1" i="0" lang="pt-BR">
                           <a:solidFill>
                             <a:srgbClr val="333333"/>
                           </a:solidFill>
@@ -4093,7 +4093,7 @@
                         <a:t>Planejamento de vendas de curto prazo melhorado e em execução</a:t>
                       </a:r>
                       <a:r>
-                        <a:rPr sz="1000" b="0" i="0">
+                        <a:rPr sz="1000" b="0" i="0" lang="pt-BR">
                           <a:solidFill>
                             <a:srgbClr val="333333"/>
                           </a:solidFill>
@@ -4128,7 +4128,7 @@
                     <a:p>
                       <a:pPr algn="l"/>
                       <a:r>
-                        <a:rPr sz="1000" b="0" i="0">
+                        <a:rPr sz="1000" b="0" i="0" lang="pt-BR">
                           <a:solidFill>
                             <a:srgbClr val="333333"/>
                           </a:solidFill>
@@ -4163,7 +4163,7 @@
                     <a:p>
                       <a:pPr algn="l"/>
                       <a:r>
-                        <a:rPr sz="1000" b="0" i="0">
+                        <a:rPr sz="1000" b="0" i="0" lang="pt-BR">
                           <a:solidFill>
                             <a:srgbClr val="6B6B6B"/>
                           </a:solidFill>
@@ -4198,7 +4198,7 @@
                     <a:p>
                       <a:pPr algn="ctr"/>
                       <a:r>
-                        <a:rPr sz="850" b="1" i="0">
+                        <a:rPr sz="850" b="1" i="0" lang="pt-BR">
                           <a:solidFill>
                             <a:srgbClr val="6B5700"/>
                           </a:solidFill>
@@ -4241,7 +4241,7 @@
                     <a:p>
                       <a:pPr algn="l"/>
                       <a:r>
-                        <a:rPr sz="1000" b="0" i="0">
+                        <a:rPr sz="1000" b="0" i="0" lang="pt-BR">
                           <a:solidFill>
                             <a:srgbClr val="828282"/>
                           </a:solidFill>
@@ -4284,7 +4284,7 @@
                     <a:p>
                       <a:pPr algn="l"/>
                       <a:r>
-                        <a:rPr sz="1000" b="0" i="0">
+                        <a:rPr sz="1000" b="0" i="0" lang="pt-BR">
                           <a:solidFill>
                             <a:srgbClr val="828282"/>
                           </a:solidFill>
@@ -4327,7 +4327,7 @@
                     <a:p>
                       <a:pPr algn="l"/>
                       <a:r>
-                        <a:rPr sz="1000" b="0" i="0">
+                        <a:rPr sz="1000" b="0" i="0" lang="pt-BR">
                           <a:solidFill>
                             <a:srgbClr val="828282"/>
                           </a:solidFill>
@@ -4372,7 +4372,7 @@
                     <a:p>
                       <a:pPr algn="l"/>
                       <a:r>
-                        <a:rPr sz="950" b="1" i="0">
+                        <a:rPr sz="950" b="1" i="0" lang="pt-BR">
                           <a:solidFill>
                             <a:srgbClr val="757575"/>
                           </a:solidFill>
@@ -4407,7 +4407,7 @@
                     <a:p>
                       <a:pPr algn="l"/>
                       <a:r>
-                        <a:rPr sz="1000" b="1" i="0">
+                        <a:rPr sz="1000" b="1" i="0" lang="pt-BR">
                           <a:solidFill>
                             <a:srgbClr val="333333"/>
                           </a:solidFill>
@@ -4442,7 +4442,7 @@
                     <a:p>
                       <a:pPr algn="l"/>
                       <a:r>
-                        <a:rPr sz="1000" b="0" i="0">
+                        <a:rPr sz="1000" b="0" i="0" lang="pt-BR">
                           <a:solidFill>
                             <a:srgbClr val="333333"/>
                           </a:solidFill>
@@ -4477,7 +4477,7 @@
                     <a:p>
                       <a:pPr algn="l"/>
                       <a:r>
-                        <a:rPr sz="1000" b="0" i="0">
+                        <a:rPr sz="1000" b="0" i="0" lang="pt-BR">
                           <a:solidFill>
                             <a:srgbClr val="6B6B6B"/>
                           </a:solidFill>
@@ -4512,7 +4512,7 @@
                     <a:p>
                       <a:pPr algn="ctr"/>
                       <a:r>
-                        <a:rPr sz="850" b="1" i="0">
+                        <a:rPr sz="850" b="1" i="0" lang="pt-BR">
                           <a:solidFill>
                             <a:srgbClr val="6B5700"/>
                           </a:solidFill>
@@ -4555,7 +4555,7 @@
                     <a:p>
                       <a:pPr algn="l"/>
                       <a:r>
-                        <a:rPr sz="1000" b="0" i="0">
+                        <a:rPr sz="1000" b="0" i="0" lang="pt-BR">
                           <a:solidFill>
                             <a:srgbClr val="828282"/>
                           </a:solidFill>
@@ -4598,7 +4598,7 @@
                     <a:p>
                       <a:pPr algn="l"/>
                       <a:r>
-                        <a:rPr sz="1000" b="0" i="0">
+                        <a:rPr sz="1000" b="0" i="0" lang="pt-BR">
                           <a:solidFill>
                             <a:srgbClr val="828282"/>
                           </a:solidFill>
@@ -4641,7 +4641,7 @@
                     <a:p>
                       <a:pPr algn="l"/>
                       <a:r>
-                        <a:rPr sz="1000" b="0" i="0">
+                        <a:rPr sz="1000" b="0" i="0" lang="pt-BR">
                           <a:solidFill>
                             <a:srgbClr val="828282"/>
                           </a:solidFill>
@@ -4686,7 +4686,7 @@
                     <a:p>
                       <a:pPr algn="l"/>
                       <a:r>
-                        <a:rPr sz="950" b="1" i="0">
+                        <a:rPr sz="950" b="1" i="0" lang="pt-BR">
                           <a:solidFill>
                             <a:srgbClr val="757575"/>
                           </a:solidFill>
@@ -4721,7 +4721,7 @@
                     <a:p>
                       <a:pPr algn="l"/>
                       <a:r>
-                        <a:rPr sz="1000" b="1" i="0">
+                        <a:rPr sz="1000" b="1" i="0" lang="pt-BR">
                           <a:solidFill>
                             <a:srgbClr val="333333"/>
                           </a:solidFill>
@@ -4730,7 +4730,7 @@
                         <a:t>Planejamento de conversão de leads em vendas evoluído</a:t>
                       </a:r>
                       <a:r>
-                        <a:rPr sz="1000" b="0" i="0">
+                        <a:rPr sz="1000" b="0" i="0" lang="pt-BR">
                           <a:solidFill>
                             <a:srgbClr val="333333"/>
                           </a:solidFill>
@@ -4765,7 +4765,7 @@
                     <a:p>
                       <a:pPr algn="l"/>
                       <a:r>
-                        <a:rPr sz="1000" b="0" i="0">
+                        <a:rPr sz="1000" b="0" i="0" lang="pt-BR">
                           <a:solidFill>
                             <a:srgbClr val="333333"/>
                           </a:solidFill>
@@ -4800,7 +4800,7 @@
                     <a:p>
                       <a:pPr algn="l"/>
                       <a:r>
-                        <a:rPr sz="1000" b="0" i="0">
+                        <a:rPr sz="1000" b="0" i="0" lang="pt-BR">
                           <a:solidFill>
                             <a:srgbClr val="6B6B6B"/>
                           </a:solidFill>
@@ -4835,7 +4835,7 @@
                     <a:p>
                       <a:pPr algn="ctr"/>
                       <a:r>
-                        <a:rPr sz="850" b="1" i="0">
+                        <a:rPr sz="850" b="1" i="0" lang="pt-BR">
                           <a:solidFill>
                             <a:srgbClr val="A30000"/>
                           </a:solidFill>
@@ -4878,7 +4878,7 @@
                     <a:p>
                       <a:pPr algn="l"/>
                       <a:r>
-                        <a:rPr sz="1000" b="0" i="0">
+                        <a:rPr sz="1000" b="0" i="0" lang="pt-BR">
                           <a:solidFill>
                             <a:srgbClr val="828282"/>
                           </a:solidFill>
@@ -4921,7 +4921,7 @@
                     <a:p>
                       <a:pPr algn="l"/>
                       <a:r>
-                        <a:rPr sz="1000" b="0" i="0">
+                        <a:rPr sz="1000" b="0" i="0" lang="pt-BR">
                           <a:solidFill>
                             <a:srgbClr val="828282"/>
                           </a:solidFill>
@@ -4964,7 +4964,7 @@
                     <a:p>
                       <a:pPr algn="l"/>
                       <a:r>
-                        <a:rPr sz="1000" b="0" i="0">
+                        <a:rPr sz="1000" b="0" i="0" lang="pt-BR">
                           <a:solidFill>
                             <a:srgbClr val="828282"/>
                           </a:solidFill>
@@ -5009,7 +5009,7 @@
                     <a:p>
                       <a:pPr algn="l"/>
                       <a:r>
-                        <a:rPr sz="950" b="1" i="0">
+                        <a:rPr sz="950" b="1" i="0" lang="pt-BR">
                           <a:solidFill>
                             <a:srgbClr val="757575"/>
                           </a:solidFill>
@@ -5044,7 +5044,7 @@
                     <a:p>
                       <a:pPr algn="l"/>
                       <a:r>
-                        <a:rPr sz="1000" b="1" i="0">
+                        <a:rPr sz="1000" b="1" i="0" lang="pt-BR">
                           <a:solidFill>
                             <a:srgbClr val="333333"/>
                           </a:solidFill>
@@ -5079,7 +5079,7 @@
                     <a:p>
                       <a:pPr algn="l"/>
                       <a:r>
-                        <a:rPr sz="1000" b="0" i="0">
+                        <a:rPr sz="1000" b="0" i="0" lang="pt-BR">
                           <a:solidFill>
                             <a:srgbClr val="333333"/>
                           </a:solidFill>
@@ -5114,7 +5114,7 @@
                     <a:p>
                       <a:pPr algn="l"/>
                       <a:r>
-                        <a:rPr sz="1000" b="0" i="0">
+                        <a:rPr sz="1000" b="0" i="0" lang="pt-BR">
                           <a:solidFill>
                             <a:srgbClr val="6B6B6B"/>
                           </a:solidFill>
@@ -5149,7 +5149,7 @@
                     <a:p>
                       <a:pPr algn="ctr"/>
                       <a:r>
-                        <a:rPr sz="850" b="1" i="0">
+                        <a:rPr sz="850" b="1" i="0" lang="pt-BR">
                           <a:solidFill>
                             <a:srgbClr val="A30000"/>
                           </a:solidFill>
@@ -5192,7 +5192,7 @@
                     <a:p>
                       <a:pPr algn="l"/>
                       <a:r>
-                        <a:rPr sz="1000" b="0" i="0">
+                        <a:rPr sz="1000" b="0" i="0" lang="pt-BR">
                           <a:solidFill>
                             <a:srgbClr val="828282"/>
                           </a:solidFill>
@@ -5235,7 +5235,7 @@
                     <a:p>
                       <a:pPr algn="l"/>
                       <a:r>
-                        <a:rPr sz="1000" b="0" i="0">
+                        <a:rPr sz="1000" b="0" i="0" lang="pt-BR">
                           <a:solidFill>
                             <a:srgbClr val="828282"/>
                           </a:solidFill>
@@ -5278,7 +5278,7 @@
                     <a:p>
                       <a:pPr algn="l"/>
                       <a:r>
-                        <a:rPr sz="1000" b="0" i="0">
+                        <a:rPr sz="1000" b="0" i="0" lang="pt-BR">
                           <a:solidFill>
                             <a:srgbClr val="828282"/>
                           </a:solidFill>
@@ -5323,7 +5323,7 @@
                     <a:p>
                       <a:pPr algn="l"/>
                       <a:r>
-                        <a:rPr sz="950" b="1" i="0">
+                        <a:rPr sz="950" b="1" i="0" lang="pt-BR">
                           <a:solidFill>
                             <a:srgbClr val="757575"/>
                           </a:solidFill>
@@ -5358,7 +5358,7 @@
                     <a:p>
                       <a:pPr algn="l"/>
                       <a:r>
-                        <a:rPr sz="1000" b="1" i="0">
+                        <a:rPr sz="1000" b="1" i="0" lang="pt-BR">
                           <a:solidFill>
                             <a:srgbClr val="333333"/>
                           </a:solidFill>
@@ -5393,7 +5393,7 @@
                     <a:p>
                       <a:pPr algn="l"/>
                       <a:r>
-                        <a:rPr sz="1000" b="0" i="0">
+                        <a:rPr sz="1000" b="0" i="0" lang="pt-BR">
                           <a:solidFill>
                             <a:srgbClr val="333333"/>
                           </a:solidFill>
@@ -5428,7 +5428,7 @@
                     <a:p>
                       <a:pPr algn="l"/>
                       <a:r>
-                        <a:rPr sz="1000" b="0" i="0">
+                        <a:rPr sz="1000" b="0" i="0" lang="pt-BR">
                           <a:solidFill>
                             <a:srgbClr val="6B6B6B"/>
                           </a:solidFill>
@@ -5463,7 +5463,7 @@
                     <a:p>
                       <a:pPr algn="ctr"/>
                       <a:r>
-                        <a:rPr sz="850" b="1" i="0">
+                        <a:rPr sz="850" b="1" i="0" lang="pt-BR">
                           <a:solidFill>
                             <a:srgbClr val="A30000"/>
                           </a:solidFill>
@@ -5506,7 +5506,7 @@
                     <a:p>
                       <a:pPr algn="l"/>
                       <a:r>
-                        <a:rPr sz="1000" b="0" i="0">
+                        <a:rPr sz="1000" b="0" i="0" lang="pt-BR">
                           <a:solidFill>
                             <a:srgbClr val="828282"/>
                           </a:solidFill>
@@ -5549,7 +5549,7 @@
                     <a:p>
                       <a:pPr algn="l"/>
                       <a:r>
-                        <a:rPr sz="1000" b="0" i="0">
+                        <a:rPr sz="1000" b="0" i="0" lang="pt-BR">
                           <a:solidFill>
                             <a:srgbClr val="828282"/>
                           </a:solidFill>
@@ -5592,7 +5592,7 @@
                     <a:p>
                       <a:pPr algn="l"/>
                       <a:r>
-                        <a:rPr sz="1000" b="0" i="0">
+                        <a:rPr sz="1000" b="0" i="0" lang="pt-BR">
                           <a:solidFill>
                             <a:srgbClr val="828282"/>
                           </a:solidFill>
@@ -5687,7 +5687,7 @@
           <a:p>
             <a:pPr algn="ctr"/>
             <a:r>
-              <a:rPr sz="1200" b="1" i="0">
+              <a:rPr sz="1200" b="1" i="0" lang="pt-BR">
                 <a:solidFill>
                   <a:srgbClr val="1A1A1A"/>
                 </a:solidFill>
@@ -5744,7 +5744,7 @@
           <a:p>
             <a:pPr algn="l"/>
             <a:r>
-              <a:rPr sz="800" b="0" i="0">
+              <a:rPr sz="800" b="0" i="0" lang="pt-BR">
                 <a:solidFill>
                   <a:srgbClr val="757575"/>
                 </a:solidFill>
@@ -5779,7 +5779,7 @@
           <a:p>
             <a:pPr algn="r"/>
             <a:r>
-              <a:rPr sz="800" b="0" i="0">
+              <a:rPr sz="800" b="0" i="0" lang="pt-BR">
                 <a:solidFill>
                   <a:srgbClr val="757575"/>
                 </a:solidFill>
@@ -5848,7 +5848,7 @@
         </p:nvGraphicFramePr>
         <p:xfrm>
           <a:off x="384048" y="274320"/>
-          <a:ext cx="11423874" cy="994791"/>
+          <a:ext cx="11423873" cy="994791"/>
         </p:xfrm>
         <a:graphic>
           <a:graphicData uri="http://schemas.openxmlformats.org/drawingml/2006/table">
@@ -5858,7 +5858,7 @@
               </a:tblPr>
               <a:tblGrid>
                 <a:gridCol w="68580"/>
-                <a:gridCol w="6966174"/>
+                <a:gridCol w="6966173"/>
                 <a:gridCol w="1737360"/>
                 <a:gridCol w="2651760"/>
               </a:tblGrid>
@@ -5894,7 +5894,7 @@
                     <a:p>
                       <a:pPr algn="l"/>
                       <a:r>
-                        <a:rPr sz="1500" b="1" i="0">
+                        <a:rPr sz="1500" b="1" i="0" lang="pt-BR">
                           <a:solidFill>
                             <a:srgbClr val="1A1A1A"/>
                           </a:solidFill>
@@ -5910,7 +5910,7 @@
                         </a:spcBef>
                       </a:pPr>
                       <a:r>
-                        <a:rPr sz="1050" b="0" i="0">
+                        <a:rPr sz="1050" b="0" i="0" lang="pt-BR">
                           <a:solidFill>
                             <a:srgbClr val="6B6B6B"/>
                           </a:solidFill>
@@ -5919,7 +5919,7 @@
                         <a:t>Melhorar a </a:t>
                       </a:r>
                       <a:r>
-                        <a:rPr sz="1050" b="1" i="0">
+                        <a:rPr sz="1050" b="1" i="0" lang="pt-BR">
                           <a:solidFill>
                             <a:srgbClr val="6B6B6B"/>
                           </a:solidFill>
@@ -5928,7 +5928,7 @@
                         <a:t>experiência dos clientes em prospecção</a:t>
                       </a:r>
                       <a:r>
-                        <a:rPr sz="1050" b="0" i="0">
+                        <a:rPr sz="1050" b="0" i="0" lang="pt-BR">
                           <a:solidFill>
                             <a:srgbClr val="6B6B6B"/>
                           </a:solidFill>
@@ -5937,7 +5937,7 @@
                         <a:t>, o </a:t>
                       </a:r>
                       <a:r>
-                        <a:rPr sz="1050" b="1" i="0">
+                        <a:rPr sz="1050" b="1" i="0" lang="pt-BR">
                           <a:solidFill>
                             <a:srgbClr val="6B6B6B"/>
                           </a:solidFill>
@@ -5946,7 +5946,7 @@
                         <a:t>entendimento de suas necessidades</a:t>
                       </a:r>
                       <a:r>
-                        <a:rPr sz="1050" b="0" i="0">
+                        <a:rPr sz="1050" b="0" i="0" lang="pt-BR">
                           <a:solidFill>
                             <a:srgbClr val="6B6B6B"/>
                           </a:solidFill>
@@ -5955,7 +5955,7 @@
                         <a:t>, a </a:t>
                       </a:r>
                       <a:r>
-                        <a:rPr sz="1050" b="1" i="0">
+                        <a:rPr sz="1050" b="1" i="0" lang="pt-BR">
                           <a:solidFill>
                             <a:srgbClr val="6B6B6B"/>
                           </a:solidFill>
@@ -5964,7 +5964,7 @@
                         <a:t>priorização dos leads com maior potencial de conversão</a:t>
                       </a:r>
                       <a:r>
-                        <a:rPr sz="1050" b="0" i="0">
+                        <a:rPr sz="1050" b="0" i="0" lang="pt-BR">
                           <a:solidFill>
                             <a:srgbClr val="6B6B6B"/>
                           </a:solidFill>
@@ -5973,7 +5973,7 @@
                         <a:t> e a </a:t>
                       </a:r>
                       <a:r>
-                        <a:rPr sz="1050" b="1" i="0">
+                        <a:rPr sz="1050" b="1" i="0" lang="pt-BR">
                           <a:solidFill>
                             <a:srgbClr val="6B6B6B"/>
                           </a:solidFill>
@@ -5982,7 +5982,7 @@
                         <a:t>alocação às estruturas de vendas</a:t>
                       </a:r>
                       <a:r>
-                        <a:rPr sz="1050" b="0" i="0">
+                        <a:rPr sz="1050" b="0" i="0" lang="pt-BR">
                           <a:solidFill>
                             <a:srgbClr val="6B6B6B"/>
                           </a:solidFill>
@@ -6017,7 +6017,7 @@
                     <a:p>
                       <a:pPr algn="l"/>
                       <a:r>
-                        <a:rPr sz="800" b="1" i="0">
+                        <a:rPr sz="800" b="1" i="0" lang="pt-BR">
                           <a:solidFill>
                             <a:srgbClr val="757575"/>
                           </a:solidFill>
@@ -6033,7 +6033,7 @@
                         </a:spcBef>
                       </a:pPr>
                       <a:r>
-                        <a:rPr sz="1000" b="0" i="0">
+                        <a:rPr sz="1000" b="0" i="0" lang="pt-BR">
                           <a:solidFill>
                             <a:srgbClr val="333333"/>
                           </a:solidFill>
@@ -6068,7 +6068,7 @@
                     <a:p>
                       <a:pPr algn="l"/>
                       <a:r>
-                        <a:rPr sz="800" b="1" i="0">
+                        <a:rPr sz="800" b="1" i="0" lang="pt-BR">
                           <a:solidFill>
                             <a:srgbClr val="757575"/>
                           </a:solidFill>
@@ -6084,7 +6084,7 @@
                         </a:spcBef>
                       </a:pPr>
                       <a:r>
-                        <a:rPr sz="1000" b="0" i="0">
+                        <a:rPr sz="1000" b="0" i="0" lang="pt-BR">
                           <a:solidFill>
                             <a:srgbClr val="333333"/>
                           </a:solidFill>
@@ -6143,7 +6143,7 @@
           <a:p>
             <a:pPr algn="l"/>
             <a:r>
-              <a:rPr sz="900" b="0" i="0">
+              <a:rPr sz="900" b="0" i="0" lang="pt-BR">
                 <a:solidFill>
                   <a:srgbClr val="333333"/>
                 </a:solidFill>
@@ -6152,7 +6152,7 @@
               <a:t/>
             </a:r>
             <a:r>
-              <a:rPr sz="900" b="1" i="0">
+              <a:rPr sz="900" b="1" i="0" lang="pt-BR">
                 <a:solidFill>
                   <a:srgbClr val="4A4A4A"/>
                 </a:solidFill>
@@ -6189,7 +6189,7 @@
           <a:p>
             <a:pPr algn="l"/>
             <a:r>
-              <a:rPr sz="900" b="0" i="0">
+              <a:rPr sz="900" b="0" i="0" lang="pt-BR">
                 <a:solidFill>
                   <a:srgbClr val="333333"/>
                 </a:solidFill>
@@ -6198,7 +6198,7 @@
               <a:t/>
             </a:r>
             <a:r>
-              <a:rPr sz="900" b="1" i="0">
+              <a:rPr sz="900" b="1" i="0" lang="pt-BR">
                 <a:solidFill>
                   <a:srgbClr val="3F7C0E"/>
                 </a:solidFill>
@@ -6235,7 +6235,7 @@
           <a:p>
             <a:pPr algn="l"/>
             <a:r>
-              <a:rPr sz="900" b="0" i="0">
+              <a:rPr sz="900" b="0" i="0" lang="pt-BR">
                 <a:solidFill>
                   <a:srgbClr val="333333"/>
                 </a:solidFill>
@@ -6244,7 +6244,7 @@
               <a:t/>
             </a:r>
             <a:r>
-              <a:rPr sz="900" b="1" i="0">
+              <a:rPr sz="900" b="1" i="0" lang="pt-BR">
                 <a:solidFill>
                   <a:srgbClr val="4A4A4A"/>
                 </a:solidFill>
@@ -6281,7 +6281,7 @@
           <a:p>
             <a:pPr algn="l"/>
             <a:r>
-              <a:rPr sz="900" b="0" i="0">
+              <a:rPr sz="900" b="0" i="0" lang="pt-BR">
                 <a:solidFill>
                   <a:srgbClr val="333333"/>
                 </a:solidFill>
@@ -6290,7 +6290,7 @@
               <a:t/>
             </a:r>
             <a:r>
-              <a:rPr sz="900" b="1" i="0">
+              <a:rPr sz="900" b="1" i="0" lang="pt-BR">
                 <a:solidFill>
                   <a:srgbClr val="4A4A4A"/>
                 </a:solidFill>
@@ -6327,7 +6327,7 @@
           <a:p>
             <a:pPr algn="l"/>
             <a:r>
-              <a:rPr sz="900" b="0" i="0">
+              <a:rPr sz="900" b="0" i="0" lang="pt-BR">
                 <a:solidFill>
                   <a:srgbClr val="333333"/>
                 </a:solidFill>
@@ -6336,7 +6336,7 @@
               <a:t/>
             </a:r>
             <a:r>
-              <a:rPr sz="900" b="1" i="0">
+              <a:rPr sz="900" b="1" i="0" lang="pt-BR">
                 <a:solidFill>
                   <a:srgbClr val="4A4A4A"/>
                 </a:solidFill>
@@ -6373,7 +6373,7 @@
           <a:p>
             <a:pPr algn="l"/>
             <a:r>
-              <a:rPr sz="900" b="0" i="0">
+              <a:rPr sz="900" b="0" i="0" lang="pt-BR">
                 <a:solidFill>
                   <a:srgbClr val="333333"/>
                 </a:solidFill>
@@ -6382,7 +6382,7 @@
               <a:t/>
             </a:r>
             <a:r>
-              <a:rPr sz="900" b="1" i="0">
+              <a:rPr sz="900" b="1" i="0" lang="pt-BR">
                 <a:solidFill>
                   <a:srgbClr val="4A4A4A"/>
                 </a:solidFill>
@@ -6417,7 +6417,7 @@
           <a:p>
             <a:pPr algn="l"/>
             <a:r>
-              <a:rPr sz="1150" b="1" i="0">
+              <a:rPr sz="1150" b="1" i="0" lang="pt-BR">
                 <a:solidFill>
                   <a:srgbClr val="1A1A1A"/>
                 </a:solidFill>
@@ -6438,7 +6438,7 @@
         </p:nvGraphicFramePr>
         <p:xfrm>
           <a:off x="384048" y="1979930"/>
-          <a:ext cx="11423874" cy="4512310"/>
+          <a:ext cx="11423870" cy="4512310"/>
         </p:xfrm>
         <a:graphic>
           <a:graphicData uri="http://schemas.openxmlformats.org/drawingml/2006/table">
@@ -6448,10 +6448,10 @@
               </a:tblPr>
               <a:tblGrid>
                 <a:gridCol w="567532"/>
-                <a:gridCol w="3020736"/>
-                <a:gridCol w="1299832"/>
-                <a:gridCol w="869606"/>
-                <a:gridCol w="1052681"/>
+                <a:gridCol w="3020735"/>
+                <a:gridCol w="1299831"/>
+                <a:gridCol w="869605"/>
+                <a:gridCol w="1052680"/>
                 <a:gridCol w="1537829"/>
                 <a:gridCol w="1537829"/>
                 <a:gridCol w="1537829"/>
@@ -6464,7 +6464,7 @@
                     <a:p>
                       <a:pPr algn="l"/>
                       <a:r>
-                        <a:rPr sz="900" b="1" i="0">
+                        <a:rPr sz="900" b="1" i="0" lang="pt-BR">
                           <a:solidFill>
                             <a:srgbClr val="757575"/>
                           </a:solidFill>
@@ -6499,7 +6499,7 @@
                     <a:p>
                       <a:pPr algn="l"/>
                       <a:r>
-                        <a:rPr sz="900" b="1" i="0">
+                        <a:rPr sz="900" b="1" i="0" lang="pt-BR">
                           <a:solidFill>
                             <a:srgbClr val="757575"/>
                           </a:solidFill>
@@ -6534,7 +6534,7 @@
                     <a:p>
                       <a:pPr algn="l"/>
                       <a:r>
-                        <a:rPr sz="900" b="1" i="0">
+                        <a:rPr sz="900" b="1" i="0" lang="pt-BR">
                           <a:solidFill>
                             <a:srgbClr val="757575"/>
                           </a:solidFill>
@@ -6569,7 +6569,7 @@
                     <a:p>
                       <a:pPr algn="l"/>
                       <a:r>
-                        <a:rPr sz="900" b="1" i="0">
+                        <a:rPr sz="900" b="1" i="0" lang="pt-BR">
                           <a:solidFill>
                             <a:srgbClr val="757575"/>
                           </a:solidFill>
@@ -6604,7 +6604,7 @@
                     <a:p>
                       <a:pPr algn="ctr"/>
                       <a:r>
-                        <a:rPr sz="900" b="1" i="0">
+                        <a:rPr sz="900" b="1" i="0" lang="pt-BR">
                           <a:solidFill>
                             <a:srgbClr val="757575"/>
                           </a:solidFill>
@@ -6639,7 +6639,7 @@
                     <a:p>
                       <a:pPr algn="l"/>
                       <a:r>
-                        <a:rPr sz="900" b="1" i="0">
+                        <a:rPr sz="900" b="1" i="0" lang="pt-BR">
                           <a:solidFill>
                             <a:srgbClr val="757575"/>
                           </a:solidFill>
@@ -6674,7 +6674,7 @@
                     <a:p>
                       <a:pPr algn="l"/>
                       <a:r>
-                        <a:rPr sz="900" b="1" i="0">
+                        <a:rPr sz="900" b="1" i="0" lang="pt-BR">
                           <a:solidFill>
                             <a:srgbClr val="757575"/>
                           </a:solidFill>
@@ -6709,7 +6709,7 @@
                     <a:p>
                       <a:pPr algn="l"/>
                       <a:r>
-                        <a:rPr sz="900" b="1" i="0">
+                        <a:rPr sz="900" b="1" i="0" lang="pt-BR">
                           <a:solidFill>
                             <a:srgbClr val="757575"/>
                           </a:solidFill>
@@ -6746,7 +6746,7 @@
                     <a:p>
                       <a:pPr algn="l"/>
                       <a:r>
-                        <a:rPr sz="950" b="1" i="0">
+                        <a:rPr sz="950" b="1" i="0" lang="pt-BR">
                           <a:solidFill>
                             <a:srgbClr val="757575"/>
                           </a:solidFill>
@@ -6781,7 +6781,7 @@
                     <a:p>
                       <a:pPr algn="l"/>
                       <a:r>
-                        <a:rPr sz="1000" b="1" i="0">
+                        <a:rPr sz="1000" b="1" i="0" lang="pt-BR">
                           <a:solidFill>
                             <a:srgbClr val="333333"/>
                           </a:solidFill>
@@ -6790,7 +6790,7 @@
                         <a:t>Ativos de captação melhorados</a:t>
                       </a:r>
                       <a:r>
-                        <a:rPr sz="1000" b="0" i="0">
+                        <a:rPr sz="1000" b="0" i="0" lang="pt-BR">
                           <a:solidFill>
                             <a:srgbClr val="333333"/>
                           </a:solidFill>
@@ -6825,7 +6825,7 @@
                     <a:p>
                       <a:pPr algn="l"/>
                       <a:r>
-                        <a:rPr sz="1000" b="0" i="0">
+                        <a:rPr sz="1000" b="0" i="0" lang="pt-BR">
                           <a:solidFill>
                             <a:srgbClr val="333333"/>
                           </a:solidFill>
@@ -6860,7 +6860,7 @@
                     <a:p>
                       <a:pPr algn="l"/>
                       <a:r>
-                        <a:rPr sz="1000" b="0" i="0">
+                        <a:rPr sz="1000" b="0" i="0" lang="pt-BR">
                           <a:solidFill>
                             <a:srgbClr val="6B6B6B"/>
                           </a:solidFill>
@@ -6895,7 +6895,7 @@
                     <a:p>
                       <a:pPr algn="ctr"/>
                       <a:r>
-                        <a:rPr sz="850" b="1" i="0">
+                        <a:rPr sz="850" b="1" i="0" lang="pt-BR">
                           <a:solidFill>
                             <a:srgbClr val="6B5700"/>
                           </a:solidFill>
@@ -6938,7 +6938,7 @@
                     <a:p>
                       <a:pPr algn="l"/>
                       <a:r>
-                        <a:rPr sz="1000" b="0" i="0">
+                        <a:rPr sz="1000" b="0" i="0" lang="pt-BR">
                           <a:solidFill>
                             <a:srgbClr val="828282"/>
                           </a:solidFill>
@@ -6981,7 +6981,7 @@
                     <a:p>
                       <a:pPr algn="l"/>
                       <a:r>
-                        <a:rPr sz="1000" b="0" i="0">
+                        <a:rPr sz="1000" b="0" i="0" lang="pt-BR">
                           <a:solidFill>
                             <a:srgbClr val="828282"/>
                           </a:solidFill>
@@ -7024,7 +7024,7 @@
                     <a:p>
                       <a:pPr algn="l"/>
                       <a:r>
-                        <a:rPr sz="1000" b="0" i="0">
+                        <a:rPr sz="1000" b="0" i="0" lang="pt-BR">
                           <a:solidFill>
                             <a:srgbClr val="828282"/>
                           </a:solidFill>
@@ -7069,7 +7069,7 @@
                     <a:p>
                       <a:pPr algn="l"/>
                       <a:r>
-                        <a:rPr sz="950" b="1" i="0">
+                        <a:rPr sz="950" b="1" i="0" lang="pt-BR">
                           <a:solidFill>
                             <a:srgbClr val="757575"/>
                           </a:solidFill>
@@ -7104,7 +7104,7 @@
                     <a:p>
                       <a:pPr algn="l"/>
                       <a:r>
-                        <a:rPr sz="1000" b="1" i="0">
+                        <a:rPr sz="1000" b="1" i="0" lang="pt-BR">
                           <a:solidFill>
                             <a:srgbClr val="333333"/>
                           </a:solidFill>
@@ -7113,7 +7113,7 @@
                         <a:t>Informações capturadas no site</a:t>
                       </a:r>
                       <a:r>
-                        <a:rPr sz="1000" b="0" i="0">
+                        <a:rPr sz="1000" b="0" i="0" lang="pt-BR">
                           <a:solidFill>
                             <a:srgbClr val="333333"/>
                           </a:solidFill>
@@ -7122,7 +7122,7 @@
                         <a:t> (ex.: localização por IP) </a:t>
                       </a:r>
                       <a:r>
-                        <a:rPr sz="1000" b="1" i="0">
+                        <a:rPr sz="1000" b="1" i="0" lang="pt-BR">
                           <a:solidFill>
                             <a:srgbClr val="333333"/>
                           </a:solidFill>
@@ -7131,7 +7131,7 @@
                         <a:t>integradas e disponíveis</a:t>
                       </a:r>
                       <a:r>
-                        <a:rPr sz="1000" b="0" i="0">
+                        <a:rPr sz="1000" b="0" i="0" lang="pt-BR">
                           <a:solidFill>
                             <a:srgbClr val="333333"/>
                           </a:solidFill>
@@ -7166,7 +7166,7 @@
                     <a:p>
                       <a:pPr algn="l"/>
                       <a:r>
-                        <a:rPr sz="1000" b="0" i="0">
+                        <a:rPr sz="1000" b="0" i="0" lang="pt-BR">
                           <a:solidFill>
                             <a:srgbClr val="333333"/>
                           </a:solidFill>
@@ -7201,7 +7201,7 @@
                     <a:p>
                       <a:pPr algn="l"/>
                       <a:r>
-                        <a:rPr sz="1000" b="0" i="0">
+                        <a:rPr sz="1000" b="0" i="0" lang="pt-BR">
                           <a:solidFill>
                             <a:srgbClr val="6B6B6B"/>
                           </a:solidFill>
@@ -7236,7 +7236,7 @@
                     <a:p>
                       <a:pPr algn="ctr"/>
                       <a:r>
-                        <a:rPr sz="850" b="1" i="0">
+                        <a:rPr sz="850" b="1" i="0" lang="pt-BR">
                           <a:solidFill>
                             <a:srgbClr val="A30000"/>
                           </a:solidFill>
@@ -7279,7 +7279,7 @@
                     <a:p>
                       <a:pPr algn="l"/>
                       <a:r>
-                        <a:rPr sz="1000" b="0" i="0">
+                        <a:rPr sz="1000" b="0" i="0" lang="pt-BR">
                           <a:solidFill>
                             <a:srgbClr val="828282"/>
                           </a:solidFill>
@@ -7322,7 +7322,7 @@
                     <a:p>
                       <a:pPr algn="l"/>
                       <a:r>
-                        <a:rPr sz="1000" b="0" i="0">
+                        <a:rPr sz="1000" b="0" i="0" lang="pt-BR">
                           <a:solidFill>
                             <a:srgbClr val="828282"/>
                           </a:solidFill>
@@ -7365,7 +7365,7 @@
                     <a:p>
                       <a:pPr algn="l"/>
                       <a:r>
-                        <a:rPr sz="1000" b="0" i="0">
+                        <a:rPr sz="1000" b="0" i="0" lang="pt-BR">
                           <a:solidFill>
                             <a:srgbClr val="828282"/>
                           </a:solidFill>
@@ -7410,7 +7410,7 @@
                     <a:p>
                       <a:pPr algn="l"/>
                       <a:r>
-                        <a:rPr sz="950" b="1" i="0">
+                        <a:rPr sz="950" b="1" i="0" lang="pt-BR">
                           <a:solidFill>
                             <a:srgbClr val="757575"/>
                           </a:solidFill>
@@ -7445,7 +7445,7 @@
                     <a:p>
                       <a:pPr algn="l"/>
                       <a:r>
-                        <a:rPr sz="1000" b="1" i="0">
+                        <a:rPr sz="1000" b="1" i="0" lang="pt-BR">
                           <a:solidFill>
                             <a:srgbClr val="333333"/>
                           </a:solidFill>
@@ -7454,7 +7454,7 @@
                         <a:t>Lead score evoluído</a:t>
                       </a:r>
                       <a:r>
-                        <a:rPr sz="1000" b="0" i="0">
+                        <a:rPr sz="1000" b="0" i="0" lang="pt-BR">
                           <a:solidFill>
                             <a:srgbClr val="333333"/>
                           </a:solidFill>
@@ -7489,7 +7489,7 @@
                     <a:p>
                       <a:pPr algn="l"/>
                       <a:r>
-                        <a:rPr sz="1000" b="0" i="0">
+                        <a:rPr sz="1000" b="0" i="0" lang="pt-BR">
                           <a:solidFill>
                             <a:srgbClr val="333333"/>
                           </a:solidFill>
@@ -7524,7 +7524,7 @@
                     <a:p>
                       <a:pPr algn="l"/>
                       <a:r>
-                        <a:rPr sz="1000" b="0" i="0">
+                        <a:rPr sz="1000" b="0" i="0" lang="pt-BR">
                           <a:solidFill>
                             <a:srgbClr val="6B6B6B"/>
                           </a:solidFill>
@@ -7559,7 +7559,7 @@
                     <a:p>
                       <a:pPr algn="ctr"/>
                       <a:r>
-                        <a:rPr sz="850" b="1" i="0">
+                        <a:rPr sz="850" b="1" i="0" lang="pt-BR">
                           <a:solidFill>
                             <a:srgbClr val="A30000"/>
                           </a:solidFill>
@@ -7602,7 +7602,7 @@
                     <a:p>
                       <a:pPr algn="l"/>
                       <a:r>
-                        <a:rPr sz="1000" b="0" i="0">
+                        <a:rPr sz="1000" b="0" i="0" lang="pt-BR">
                           <a:solidFill>
                             <a:srgbClr val="828282"/>
                           </a:solidFill>
@@ -7645,7 +7645,7 @@
                     <a:p>
                       <a:pPr algn="l"/>
                       <a:r>
-                        <a:rPr sz="1000" b="0" i="0">
+                        <a:rPr sz="1000" b="0" i="0" lang="pt-BR">
                           <a:solidFill>
                             <a:srgbClr val="828282"/>
                           </a:solidFill>
@@ -7688,7 +7688,7 @@
                     <a:p>
                       <a:pPr algn="l"/>
                       <a:r>
-                        <a:rPr sz="1000" b="0" i="0">
+                        <a:rPr sz="1000" b="0" i="0" lang="pt-BR">
                           <a:solidFill>
                             <a:srgbClr val="828282"/>
                           </a:solidFill>
@@ -7733,7 +7733,7 @@
                     <a:p>
                       <a:pPr algn="l"/>
                       <a:r>
-                        <a:rPr sz="950" b="1" i="0">
+                        <a:rPr sz="950" b="1" i="0" lang="pt-BR">
                           <a:solidFill>
                             <a:srgbClr val="757575"/>
                           </a:solidFill>
@@ -7768,7 +7768,7 @@
                     <a:p>
                       <a:pPr algn="l"/>
                       <a:r>
-                        <a:rPr sz="1000" b="1" i="0">
+                        <a:rPr sz="1000" b="1" i="0" lang="pt-BR">
                           <a:solidFill>
                             <a:srgbClr val="333333"/>
                           </a:solidFill>
@@ -7803,7 +7803,7 @@
                     <a:p>
                       <a:pPr algn="l"/>
                       <a:r>
-                        <a:rPr sz="1000" b="0" i="0">
+                        <a:rPr sz="1000" b="0" i="0" lang="pt-BR">
                           <a:solidFill>
                             <a:srgbClr val="333333"/>
                           </a:solidFill>
@@ -7838,7 +7838,7 @@
                     <a:p>
                       <a:pPr algn="l"/>
                       <a:r>
-                        <a:rPr sz="1000" b="0" i="0">
+                        <a:rPr sz="1000" b="0" i="0" lang="pt-BR">
                           <a:solidFill>
                             <a:srgbClr val="6B6B6B"/>
                           </a:solidFill>
@@ -7873,7 +7873,7 @@
                     <a:p>
                       <a:pPr algn="ctr"/>
                       <a:r>
-                        <a:rPr sz="850" b="1" i="0">
+                        <a:rPr sz="850" b="1" i="0" lang="pt-BR">
                           <a:solidFill>
                             <a:srgbClr val="6B5700"/>
                           </a:solidFill>
@@ -7916,7 +7916,7 @@
                     <a:p>
                       <a:pPr algn="l"/>
                       <a:r>
-                        <a:rPr sz="1000" b="0" i="0">
+                        <a:rPr sz="1000" b="0" i="0" lang="pt-BR">
                           <a:solidFill>
                             <a:srgbClr val="828282"/>
                           </a:solidFill>
@@ -7959,7 +7959,7 @@
                     <a:p>
                       <a:pPr algn="l"/>
                       <a:r>
-                        <a:rPr sz="1000" b="0" i="0">
+                        <a:rPr sz="1000" b="0" i="0" lang="pt-BR">
                           <a:solidFill>
                             <a:srgbClr val="828282"/>
                           </a:solidFill>
@@ -8002,7 +8002,7 @@
                     <a:p>
                       <a:pPr algn="l"/>
                       <a:r>
-                        <a:rPr sz="1000" b="0" i="0">
+                        <a:rPr sz="1000" b="0" i="0" lang="pt-BR">
                           <a:solidFill>
                             <a:srgbClr val="828282"/>
                           </a:solidFill>
@@ -8047,7 +8047,7 @@
                     <a:p>
                       <a:pPr algn="l"/>
                       <a:r>
-                        <a:rPr sz="950" b="1" i="0">
+                        <a:rPr sz="950" b="1" i="0" lang="pt-BR">
                           <a:solidFill>
                             <a:srgbClr val="757575"/>
                           </a:solidFill>
@@ -8082,7 +8082,7 @@
                     <a:p>
                       <a:pPr algn="l"/>
                       <a:r>
-                        <a:rPr sz="1000" b="0" i="0">
+                        <a:rPr sz="1000" b="0" i="0" lang="pt-BR">
                           <a:solidFill>
                             <a:srgbClr val="333333"/>
                           </a:solidFill>
@@ -8091,7 +8091,7 @@
                         <a:t>Piloto com </a:t>
                       </a:r>
                       <a:r>
-                        <a:rPr sz="1000" b="1" i="0">
+                        <a:rPr sz="1000" b="1" i="0" lang="pt-BR">
                           <a:solidFill>
                             <a:srgbClr val="333333"/>
                           </a:solidFill>
@@ -8100,7 +8100,7 @@
                         <a:t>nova lógica de roteamento</a:t>
                       </a:r>
                       <a:r>
-                        <a:rPr sz="1000" b="0" i="0">
+                        <a:rPr sz="1000" b="0" i="0" lang="pt-BR">
                           <a:solidFill>
                             <a:srgbClr val="333333"/>
                           </a:solidFill>
@@ -8135,7 +8135,7 @@
                     <a:p>
                       <a:pPr algn="l"/>
                       <a:r>
-                        <a:rPr sz="1000" b="0" i="0">
+                        <a:rPr sz="1000" b="0" i="0" lang="pt-BR">
                           <a:solidFill>
                             <a:srgbClr val="333333"/>
                           </a:solidFill>
@@ -8170,7 +8170,7 @@
                     <a:p>
                       <a:pPr algn="l"/>
                       <a:r>
-                        <a:rPr sz="1000" b="0" i="0">
+                        <a:rPr sz="1000" b="0" i="0" lang="pt-BR">
                           <a:solidFill>
                             <a:srgbClr val="6B6B6B"/>
                           </a:solidFill>
@@ -8205,7 +8205,7 @@
                     <a:p>
                       <a:pPr algn="ctr"/>
                       <a:r>
-                        <a:rPr sz="850" b="1" i="0">
+                        <a:rPr sz="850" b="1" i="0" lang="pt-BR">
                           <a:solidFill>
                             <a:srgbClr val="146A3D"/>
                           </a:solidFill>
@@ -8248,7 +8248,7 @@
                     <a:p>
                       <a:pPr algn="l"/>
                       <a:r>
-                        <a:rPr sz="1000" b="0" i="0">
+                        <a:rPr sz="1000" b="0" i="0" lang="pt-BR">
                           <a:solidFill>
                             <a:srgbClr val="828282"/>
                           </a:solidFill>
@@ -8291,7 +8291,7 @@
                     <a:p>
                       <a:pPr algn="l"/>
                       <a:r>
-                        <a:rPr sz="1000" b="0" i="0">
+                        <a:rPr sz="1000" b="0" i="0" lang="pt-BR">
                           <a:solidFill>
                             <a:srgbClr val="828282"/>
                           </a:solidFill>
@@ -8334,7 +8334,7 @@
                     <a:p>
                       <a:pPr algn="l"/>
                       <a:r>
-                        <a:rPr sz="1000" b="0" i="0">
+                        <a:rPr sz="1000" b="0" i="0" lang="pt-BR">
                           <a:solidFill>
                             <a:srgbClr val="828282"/>
                           </a:solidFill>
@@ -8379,7 +8379,7 @@
                     <a:p>
                       <a:pPr algn="l"/>
                       <a:r>
-                        <a:rPr sz="950" b="1" i="0">
+                        <a:rPr sz="950" b="1" i="0" lang="pt-BR">
                           <a:solidFill>
                             <a:srgbClr val="757575"/>
                           </a:solidFill>
@@ -8414,7 +8414,7 @@
                     <a:p>
                       <a:pPr algn="l"/>
                       <a:r>
-                        <a:rPr sz="1000" b="1" i="0">
+                        <a:rPr sz="1000" b="1" i="0" lang="pt-BR">
                           <a:solidFill>
                             <a:srgbClr val="333333"/>
                           </a:solidFill>
@@ -8423,7 +8423,7 @@
                         <a:t>Novo modelo de alocação de leads em lojas escalado</a:t>
                       </a:r>
                       <a:r>
-                        <a:rPr sz="1000" b="0" i="0">
+                        <a:rPr sz="1000" b="0" i="0" lang="pt-BR">
                           <a:solidFill>
                             <a:srgbClr val="333333"/>
                           </a:solidFill>
@@ -8458,7 +8458,7 @@
                     <a:p>
                       <a:pPr algn="l"/>
                       <a:r>
-                        <a:rPr sz="1000" b="0" i="0">
+                        <a:rPr sz="1000" b="0" i="0" lang="pt-BR">
                           <a:solidFill>
                             <a:srgbClr val="333333"/>
                           </a:solidFill>
@@ -8493,7 +8493,7 @@
                     <a:p>
                       <a:pPr algn="l"/>
                       <a:r>
-                        <a:rPr sz="1000" b="0" i="0">
+                        <a:rPr sz="1000" b="0" i="0" lang="pt-BR">
                           <a:solidFill>
                             <a:srgbClr val="6B6B6B"/>
                           </a:solidFill>
@@ -8528,7 +8528,7 @@
                     <a:p>
                       <a:pPr algn="ctr"/>
                       <a:r>
-                        <a:rPr sz="850" b="1" i="0">
+                        <a:rPr sz="850" b="1" i="0" lang="pt-BR">
                           <a:solidFill>
                             <a:srgbClr val="A30000"/>
                           </a:solidFill>
@@ -8571,7 +8571,7 @@
                     <a:p>
                       <a:pPr algn="l"/>
                       <a:r>
-                        <a:rPr sz="1000" b="0" i="0">
+                        <a:rPr sz="1000" b="0" i="0" lang="pt-BR">
                           <a:solidFill>
                             <a:srgbClr val="828282"/>
                           </a:solidFill>
@@ -8614,7 +8614,7 @@
                     <a:p>
                       <a:pPr algn="l"/>
                       <a:r>
-                        <a:rPr sz="1000" b="0" i="0">
+                        <a:rPr sz="1000" b="0" i="0" lang="pt-BR">
                           <a:solidFill>
                             <a:srgbClr val="828282"/>
                           </a:solidFill>
@@ -8657,7 +8657,7 @@
                     <a:p>
                       <a:pPr algn="l"/>
                       <a:r>
-                        <a:rPr sz="1000" b="0" i="0">
+                        <a:rPr sz="1000" b="0" i="0" lang="pt-BR">
                           <a:solidFill>
                             <a:srgbClr val="828282"/>
                           </a:solidFill>
@@ -8702,7 +8702,7 @@
                     <a:p>
                       <a:pPr algn="l"/>
                       <a:r>
-                        <a:rPr sz="950" b="1" i="0">
+                        <a:rPr sz="950" b="1" i="0" lang="pt-BR">
                           <a:solidFill>
                             <a:srgbClr val="757575"/>
                           </a:solidFill>
@@ -8737,7 +8737,7 @@
                     <a:p>
                       <a:pPr algn="l"/>
                       <a:r>
-                        <a:rPr sz="1000" b="1" i="0">
+                        <a:rPr sz="1000" b="1" i="0" lang="pt-BR">
                           <a:solidFill>
                             <a:srgbClr val="333333"/>
                           </a:solidFill>
@@ -8746,7 +8746,7 @@
                         <a:t>Piloto de alocação total dos leads na Liza</a:t>
                       </a:r>
                       <a:r>
-                        <a:rPr sz="1000" b="0" i="0">
+                        <a:rPr sz="1000" b="0" i="0" lang="pt-BR">
                           <a:solidFill>
                             <a:srgbClr val="333333"/>
                           </a:solidFill>
@@ -8781,7 +8781,7 @@
                     <a:p>
                       <a:pPr algn="l"/>
                       <a:r>
-                        <a:rPr sz="1000" b="0" i="0">
+                        <a:rPr sz="1000" b="0" i="0" lang="pt-BR">
                           <a:solidFill>
                             <a:srgbClr val="333333"/>
                           </a:solidFill>
@@ -8816,7 +8816,7 @@
                     <a:p>
                       <a:pPr algn="l"/>
                       <a:r>
-                        <a:rPr sz="1000" b="0" i="0">
+                        <a:rPr sz="1000" b="0" i="0" lang="pt-BR">
                           <a:solidFill>
                             <a:srgbClr val="6B6B6B"/>
                           </a:solidFill>
@@ -8851,7 +8851,7 @@
                     <a:p>
                       <a:pPr algn="ctr"/>
                       <a:r>
-                        <a:rPr sz="850" b="1" i="0">
+                        <a:rPr sz="850" b="1" i="0" lang="pt-BR">
                           <a:solidFill>
                             <a:srgbClr val="A30000"/>
                           </a:solidFill>
@@ -8894,7 +8894,7 @@
                     <a:p>
                       <a:pPr algn="l"/>
                       <a:r>
-                        <a:rPr sz="1000" b="0" i="0">
+                        <a:rPr sz="1000" b="0" i="0" lang="pt-BR">
                           <a:solidFill>
                             <a:srgbClr val="828282"/>
                           </a:solidFill>
@@ -8937,7 +8937,7 @@
                     <a:p>
                       <a:pPr algn="l"/>
                       <a:r>
-                        <a:rPr sz="1000" b="0" i="0">
+                        <a:rPr sz="1000" b="0" i="0" lang="pt-BR">
                           <a:solidFill>
                             <a:srgbClr val="828282"/>
                           </a:solidFill>
@@ -8980,7 +8980,7 @@
                     <a:p>
                       <a:pPr algn="l"/>
                       <a:r>
-                        <a:rPr sz="1000" b="0" i="0">
+                        <a:rPr sz="1000" b="0" i="0" lang="pt-BR">
                           <a:solidFill>
                             <a:srgbClr val="828282"/>
                           </a:solidFill>
@@ -9025,7 +9025,7 @@
                     <a:p>
                       <a:pPr algn="l"/>
                       <a:r>
-                        <a:rPr sz="950" b="1" i="0">
+                        <a:rPr sz="950" b="1" i="0" lang="pt-BR">
                           <a:solidFill>
                             <a:srgbClr val="757575"/>
                           </a:solidFill>
@@ -9060,7 +9060,7 @@
                     <a:p>
                       <a:pPr algn="l"/>
                       <a:r>
-                        <a:rPr sz="1000" b="1" i="0">
+                        <a:rPr sz="1000" b="1" i="0" lang="pt-BR">
                           <a:solidFill>
                             <a:srgbClr val="333333"/>
                           </a:solidFill>
@@ -9069,7 +9069,7 @@
                         <a:t>Modelo de clusterização revisado</a:t>
                       </a:r>
                       <a:r>
-                        <a:rPr sz="1000" b="0" i="0">
+                        <a:rPr sz="1000" b="0" i="0" lang="pt-BR">
                           <a:solidFill>
                             <a:srgbClr val="333333"/>
                           </a:solidFill>
@@ -9104,7 +9104,7 @@
                     <a:p>
                       <a:pPr algn="l"/>
                       <a:r>
-                        <a:rPr sz="1000" b="0" i="0">
+                        <a:rPr sz="1000" b="0" i="0" lang="pt-BR">
                           <a:solidFill>
                             <a:srgbClr val="333333"/>
                           </a:solidFill>
@@ -9139,7 +9139,7 @@
                     <a:p>
                       <a:pPr algn="l"/>
                       <a:r>
-                        <a:rPr sz="1000" b="0" i="0">
+                        <a:rPr sz="1000" b="0" i="0" lang="pt-BR">
                           <a:solidFill>
                             <a:srgbClr val="6B6B6B"/>
                           </a:solidFill>
@@ -9174,7 +9174,7 @@
                     <a:p>
                       <a:pPr algn="ctr"/>
                       <a:r>
-                        <a:rPr sz="850" b="1" i="0">
+                        <a:rPr sz="850" b="1" i="0" lang="pt-BR">
                           <a:solidFill>
                             <a:srgbClr val="A30000"/>
                           </a:solidFill>
@@ -9217,7 +9217,7 @@
                     <a:p>
                       <a:pPr algn="l"/>
                       <a:r>
-                        <a:rPr sz="1000" b="0" i="0">
+                        <a:rPr sz="1000" b="0" i="0" lang="pt-BR">
                           <a:solidFill>
                             <a:srgbClr val="828282"/>
                           </a:solidFill>
@@ -9260,7 +9260,7 @@
                     <a:p>
                       <a:pPr algn="l"/>
                       <a:r>
-                        <a:rPr sz="1000" b="0" i="0">
+                        <a:rPr sz="1000" b="0" i="0" lang="pt-BR">
                           <a:solidFill>
                             <a:srgbClr val="828282"/>
                           </a:solidFill>
@@ -9303,7 +9303,7 @@
                     <a:p>
                       <a:pPr algn="l"/>
                       <a:r>
-                        <a:rPr sz="1000" b="0" i="0">
+                        <a:rPr sz="1000" b="0" i="0" lang="pt-BR">
                           <a:solidFill>
                             <a:srgbClr val="828282"/>
                           </a:solidFill>
@@ -9398,7 +9398,7 @@
           <a:p>
             <a:pPr algn="ctr"/>
             <a:r>
-              <a:rPr sz="1200" b="1" i="0">
+              <a:rPr sz="1200" b="1" i="0" lang="pt-BR">
                 <a:solidFill>
                   <a:srgbClr val="1A1A1A"/>
                 </a:solidFill>
@@ -9455,7 +9455,7 @@
           <a:p>
             <a:pPr algn="l"/>
             <a:r>
-              <a:rPr sz="800" b="0" i="0">
+              <a:rPr sz="800" b="0" i="0" lang="pt-BR">
                 <a:solidFill>
                   <a:srgbClr val="757575"/>
                 </a:solidFill>
@@ -9490,7 +9490,7 @@
           <a:p>
             <a:pPr algn="r"/>
             <a:r>
-              <a:rPr sz="800" b="0" i="0">
+              <a:rPr sz="800" b="0" i="0" lang="pt-BR">
                 <a:solidFill>
                   <a:srgbClr val="757575"/>
                 </a:solidFill>
@@ -9559,7 +9559,7 @@
         </p:nvGraphicFramePr>
         <p:xfrm>
           <a:off x="384048" y="274320"/>
-          <a:ext cx="11423874" cy="994791"/>
+          <a:ext cx="11423873" cy="994791"/>
         </p:xfrm>
         <a:graphic>
           <a:graphicData uri="http://schemas.openxmlformats.org/drawingml/2006/table">
@@ -9569,7 +9569,7 @@
               </a:tblPr>
               <a:tblGrid>
                 <a:gridCol w="68580"/>
-                <a:gridCol w="6966174"/>
+                <a:gridCol w="6966173"/>
                 <a:gridCol w="1737360"/>
                 <a:gridCol w="2651760"/>
               </a:tblGrid>
@@ -9605,7 +9605,7 @@
                     <a:p>
                       <a:pPr algn="l"/>
                       <a:r>
-                        <a:rPr sz="1500" b="1" i="0">
+                        <a:rPr sz="1500" b="1" i="0" lang="pt-BR">
                           <a:solidFill>
                             <a:srgbClr val="1A1A1A"/>
                           </a:solidFill>
@@ -9621,7 +9621,7 @@
                         </a:spcBef>
                       </a:pPr>
                       <a:r>
-                        <a:rPr sz="1050" b="0" i="0">
+                        <a:rPr sz="1050" b="0" i="0" lang="pt-BR">
                           <a:solidFill>
                             <a:srgbClr val="6B6B6B"/>
                           </a:solidFill>
@@ -9630,7 +9630,7 @@
                         <a:t>Usar a Liza para </a:t>
                       </a:r>
                       <a:r>
-                        <a:rPr sz="1050" b="1" i="0">
+                        <a:rPr sz="1050" b="1" i="0" lang="pt-BR">
                           <a:solidFill>
                             <a:srgbClr val="6B6B6B"/>
                           </a:solidFill>
@@ -9639,7 +9639,7 @@
                         <a:t>entender a necessidade do cliente</a:t>
                       </a:r>
                       <a:r>
-                        <a:rPr sz="1050" b="0" i="0">
+                        <a:rPr sz="1050" b="0" i="0" lang="pt-BR">
                           <a:solidFill>
                             <a:srgbClr val="6B6B6B"/>
                           </a:solidFill>
@@ -9648,7 +9648,7 @@
                         <a:t>, direcioná-lo à </a:t>
                       </a:r>
                       <a:r>
-                        <a:rPr sz="1050" b="1" i="0">
+                        <a:rPr sz="1050" b="1" i="0" lang="pt-BR">
                           <a:solidFill>
                             <a:srgbClr val="6B6B6B"/>
                           </a:solidFill>
@@ -9657,7 +9657,7 @@
                         <a:t>loja mais aderente</a:t>
                       </a:r>
                       <a:r>
-                        <a:rPr sz="1050" b="0" i="0">
+                        <a:rPr sz="1050" b="0" i="0" lang="pt-BR">
                           <a:solidFill>
                             <a:srgbClr val="6B6B6B"/>
                           </a:solidFill>
@@ -9666,7 +9666,7 @@
                         <a:t> e </a:t>
                       </a:r>
                       <a:r>
-                        <a:rPr sz="1050" b="1" i="0">
+                        <a:rPr sz="1050" b="1" i="0" lang="pt-BR">
                           <a:solidFill>
                             <a:srgbClr val="6B6B6B"/>
                           </a:solidFill>
@@ -9675,7 +9675,7 @@
                         <a:t>maximizar, inicialmente, a conversão em comparecimento</a:t>
                       </a:r>
                       <a:r>
-                        <a:rPr sz="1050" b="0" i="0">
+                        <a:rPr sz="1050" b="0" i="0" lang="pt-BR">
                           <a:solidFill>
                             <a:srgbClr val="6B6B6B"/>
                           </a:solidFill>
@@ -9684,7 +9684,7 @@
                         <a:t> — além de aumentar a </a:t>
                       </a:r>
                       <a:r>
-                        <a:rPr sz="1050" b="1" i="0">
+                        <a:rPr sz="1050" b="1" i="0" lang="pt-BR">
                           <a:solidFill>
                             <a:srgbClr val="6B6B6B"/>
                           </a:solidFill>
@@ -9693,7 +9693,7 @@
                         <a:t>produtividade do vendedor humano</a:t>
                       </a:r>
                       <a:r>
-                        <a:rPr sz="1050" b="0" i="0">
+                        <a:rPr sz="1050" b="0" i="0" lang="pt-BR">
                           <a:solidFill>
                             <a:srgbClr val="6B6B6B"/>
                           </a:solidFill>
@@ -9728,7 +9728,7 @@
                     <a:p>
                       <a:pPr algn="l"/>
                       <a:r>
-                        <a:rPr sz="800" b="1" i="0">
+                        <a:rPr sz="800" b="1" i="0" lang="pt-BR">
                           <a:solidFill>
                             <a:srgbClr val="757575"/>
                           </a:solidFill>
@@ -9744,7 +9744,7 @@
                         </a:spcBef>
                       </a:pPr>
                       <a:r>
-                        <a:rPr sz="1000" b="0" i="0">
+                        <a:rPr sz="1000" b="0" i="0" lang="pt-BR">
                           <a:solidFill>
                             <a:srgbClr val="333333"/>
                           </a:solidFill>
@@ -9779,7 +9779,7 @@
                     <a:p>
                       <a:pPr algn="l"/>
                       <a:r>
-                        <a:rPr sz="800" b="1" i="0">
+                        <a:rPr sz="800" b="1" i="0" lang="pt-BR">
                           <a:solidFill>
                             <a:srgbClr val="757575"/>
                           </a:solidFill>
@@ -9795,7 +9795,7 @@
                         </a:spcBef>
                       </a:pPr>
                       <a:r>
-                        <a:rPr sz="1000" b="0" i="0">
+                        <a:rPr sz="1000" b="0" i="0" lang="pt-BR">
                           <a:solidFill>
                             <a:srgbClr val="333333"/>
                           </a:solidFill>
@@ -9854,7 +9854,7 @@
           <a:p>
             <a:pPr algn="l"/>
             <a:r>
-              <a:rPr sz="900" b="0" i="0">
+              <a:rPr sz="900" b="0" i="0" lang="pt-BR">
                 <a:solidFill>
                   <a:srgbClr val="333333"/>
                 </a:solidFill>
@@ -9863,7 +9863,7 @@
               <a:t/>
             </a:r>
             <a:r>
-              <a:rPr sz="900" b="1" i="0">
+              <a:rPr sz="900" b="1" i="0" lang="pt-BR">
                 <a:solidFill>
                   <a:srgbClr val="4A4A4A"/>
                 </a:solidFill>
@@ -9900,7 +9900,7 @@
           <a:p>
             <a:pPr algn="l"/>
             <a:r>
-              <a:rPr sz="900" b="0" i="0">
+              <a:rPr sz="900" b="0" i="0" lang="pt-BR">
                 <a:solidFill>
                   <a:srgbClr val="333333"/>
                 </a:solidFill>
@@ -9909,7 +9909,7 @@
               <a:t/>
             </a:r>
             <a:r>
-              <a:rPr sz="900" b="1" i="0">
+              <a:rPr sz="900" b="1" i="0" lang="pt-BR">
                 <a:solidFill>
                   <a:srgbClr val="4A4A4A"/>
                 </a:solidFill>
@@ -9946,7 +9946,7 @@
           <a:p>
             <a:pPr algn="l"/>
             <a:r>
-              <a:rPr sz="900" b="0" i="0">
+              <a:rPr sz="900" b="0" i="0" lang="pt-BR">
                 <a:solidFill>
                   <a:srgbClr val="333333"/>
                 </a:solidFill>
@@ -9955,7 +9955,7 @@
               <a:t/>
             </a:r>
             <a:r>
-              <a:rPr sz="900" b="1" i="0">
+              <a:rPr sz="900" b="1" i="0" lang="pt-BR">
                 <a:solidFill>
                   <a:srgbClr val="3F7C0E"/>
                 </a:solidFill>
@@ -9992,7 +9992,7 @@
           <a:p>
             <a:pPr algn="l"/>
             <a:r>
-              <a:rPr sz="900" b="0" i="0">
+              <a:rPr sz="900" b="0" i="0" lang="pt-BR">
                 <a:solidFill>
                   <a:srgbClr val="333333"/>
                 </a:solidFill>
@@ -10001,7 +10001,7 @@
               <a:t/>
             </a:r>
             <a:r>
-              <a:rPr sz="900" b="1" i="0">
+              <a:rPr sz="900" b="1" i="0" lang="pt-BR">
                 <a:solidFill>
                   <a:srgbClr val="4A4A4A"/>
                 </a:solidFill>
@@ -10038,7 +10038,7 @@
           <a:p>
             <a:pPr algn="l"/>
             <a:r>
-              <a:rPr sz="900" b="0" i="0">
+              <a:rPr sz="900" b="0" i="0" lang="pt-BR">
                 <a:solidFill>
                   <a:srgbClr val="333333"/>
                 </a:solidFill>
@@ -10047,7 +10047,7 @@
               <a:t/>
             </a:r>
             <a:r>
-              <a:rPr sz="900" b="1" i="0">
+              <a:rPr sz="900" b="1" i="0" lang="pt-BR">
                 <a:solidFill>
                   <a:srgbClr val="4A4A4A"/>
                 </a:solidFill>
@@ -10084,7 +10084,7 @@
           <a:p>
             <a:pPr algn="l"/>
             <a:r>
-              <a:rPr sz="900" b="0" i="0">
+              <a:rPr sz="900" b="0" i="0" lang="pt-BR">
                 <a:solidFill>
                   <a:srgbClr val="333333"/>
                 </a:solidFill>
@@ -10093,7 +10093,7 @@
               <a:t/>
             </a:r>
             <a:r>
-              <a:rPr sz="900" b="1" i="0">
+              <a:rPr sz="900" b="1" i="0" lang="pt-BR">
                 <a:solidFill>
                   <a:srgbClr val="4A4A4A"/>
                 </a:solidFill>
@@ -10128,7 +10128,7 @@
           <a:p>
             <a:pPr algn="l"/>
             <a:r>
-              <a:rPr sz="1150" b="1" i="0">
+              <a:rPr sz="1150" b="1" i="0" lang="pt-BR">
                 <a:solidFill>
                   <a:srgbClr val="1A1A1A"/>
                 </a:solidFill>
@@ -10163,7 +10163,7 @@
           <a:p>
             <a:pPr algn="r"/>
             <a:r>
-              <a:rPr sz="800" b="0" i="0">
+              <a:rPr sz="800" b="0" i="0" lang="pt-BR">
                 <a:solidFill>
                   <a:srgbClr val="757575"/>
                 </a:solidFill>
@@ -10184,7 +10184,7 @@
         </p:nvGraphicFramePr>
         <p:xfrm>
           <a:off x="384048" y="1979930"/>
-          <a:ext cx="11423874" cy="4512312"/>
+          <a:ext cx="11423870" cy="4512312"/>
         </p:xfrm>
         <a:graphic>
           <a:graphicData uri="http://schemas.openxmlformats.org/drawingml/2006/table">
@@ -10194,10 +10194,10 @@
               </a:tblPr>
               <a:tblGrid>
                 <a:gridCol w="567532"/>
-                <a:gridCol w="3020736"/>
-                <a:gridCol w="1299832"/>
-                <a:gridCol w="869606"/>
-                <a:gridCol w="1052681"/>
+                <a:gridCol w="3020735"/>
+                <a:gridCol w="1299831"/>
+                <a:gridCol w="869605"/>
+                <a:gridCol w="1052680"/>
                 <a:gridCol w="1537829"/>
                 <a:gridCol w="1537829"/>
                 <a:gridCol w="1537829"/>
@@ -10210,7 +10210,7 @@
                     <a:p>
                       <a:pPr algn="l"/>
                       <a:r>
-                        <a:rPr sz="900" b="1" i="0">
+                        <a:rPr sz="900" b="1" i="0" lang="pt-BR">
                           <a:solidFill>
                             <a:srgbClr val="757575"/>
                           </a:solidFill>
@@ -10245,7 +10245,7 @@
                     <a:p>
                       <a:pPr algn="l"/>
                       <a:r>
-                        <a:rPr sz="900" b="1" i="0">
+                        <a:rPr sz="900" b="1" i="0" lang="pt-BR">
                           <a:solidFill>
                             <a:srgbClr val="757575"/>
                           </a:solidFill>
@@ -10280,7 +10280,7 @@
                     <a:p>
                       <a:pPr algn="l"/>
                       <a:r>
-                        <a:rPr sz="900" b="1" i="0">
+                        <a:rPr sz="900" b="1" i="0" lang="pt-BR">
                           <a:solidFill>
                             <a:srgbClr val="757575"/>
                           </a:solidFill>
@@ -10315,7 +10315,7 @@
                     <a:p>
                       <a:pPr algn="l"/>
                       <a:r>
-                        <a:rPr sz="900" b="1" i="0">
+                        <a:rPr sz="900" b="1" i="0" lang="pt-BR">
                           <a:solidFill>
                             <a:srgbClr val="757575"/>
                           </a:solidFill>
@@ -10350,7 +10350,7 @@
                     <a:p>
                       <a:pPr algn="ctr"/>
                       <a:r>
-                        <a:rPr sz="900" b="1" i="0">
+                        <a:rPr sz="900" b="1" i="0" lang="pt-BR">
                           <a:solidFill>
                             <a:srgbClr val="757575"/>
                           </a:solidFill>
@@ -10385,7 +10385,7 @@
                     <a:p>
                       <a:pPr algn="l"/>
                       <a:r>
-                        <a:rPr sz="900" b="1" i="0">
+                        <a:rPr sz="900" b="1" i="0" lang="pt-BR">
                           <a:solidFill>
                             <a:srgbClr val="757575"/>
                           </a:solidFill>
@@ -10420,7 +10420,7 @@
                     <a:p>
                       <a:pPr algn="l"/>
                       <a:r>
-                        <a:rPr sz="900" b="1" i="0">
+                        <a:rPr sz="900" b="1" i="0" lang="pt-BR">
                           <a:solidFill>
                             <a:srgbClr val="757575"/>
                           </a:solidFill>
@@ -10455,7 +10455,7 @@
                     <a:p>
                       <a:pPr algn="l"/>
                       <a:r>
-                        <a:rPr sz="900" b="1" i="0">
+                        <a:rPr sz="900" b="1" i="0" lang="pt-BR">
                           <a:solidFill>
                             <a:srgbClr val="757575"/>
                           </a:solidFill>
@@ -10492,7 +10492,7 @@
                     <a:p>
                       <a:pPr algn="l"/>
                       <a:r>
-                        <a:rPr sz="950" b="1" i="0">
+                        <a:rPr sz="950" b="1" i="0" lang="pt-BR">
                           <a:solidFill>
                             <a:srgbClr val="757575"/>
                           </a:solidFill>
@@ -10527,7 +10527,7 @@
                     <a:p>
                       <a:pPr algn="l"/>
                       <a:r>
-                        <a:rPr sz="1000" b="1" i="0">
+                        <a:rPr sz="1000" b="1" i="0" lang="pt-BR">
                           <a:solidFill>
                             <a:srgbClr val="333333"/>
                           </a:solidFill>
@@ -10536,7 +10536,7 @@
                         <a:t>Melhorias dos pontos críticos da jornada</a:t>
                       </a:r>
                       <a:r>
-                        <a:rPr sz="1000" b="0" i="0">
+                        <a:rPr sz="1000" b="0" i="0" lang="pt-BR">
                           <a:solidFill>
                             <a:srgbClr val="333333"/>
                           </a:solidFill>
@@ -10571,7 +10571,7 @@
                     <a:p>
                       <a:pPr algn="l"/>
                       <a:r>
-                        <a:rPr sz="1000" b="0" i="0">
+                        <a:rPr sz="1000" b="0" i="0" lang="pt-BR">
                           <a:solidFill>
                             <a:srgbClr val="333333"/>
                           </a:solidFill>
@@ -10606,7 +10606,7 @@
                     <a:p>
                       <a:pPr algn="l"/>
                       <a:r>
-                        <a:rPr sz="1000" b="0" i="0">
+                        <a:rPr sz="1000" b="0" i="0" lang="pt-BR">
                           <a:solidFill>
                             <a:srgbClr val="6B6B6B"/>
                           </a:solidFill>
@@ -10641,7 +10641,7 @@
                     <a:p>
                       <a:pPr algn="ctr"/>
                       <a:r>
-                        <a:rPr sz="850" b="1" i="0">
+                        <a:rPr sz="850" b="1" i="0" lang="pt-BR">
                           <a:solidFill>
                             <a:srgbClr val="6B5700"/>
                           </a:solidFill>
@@ -10684,7 +10684,7 @@
                     <a:p>
                       <a:pPr algn="l"/>
                       <a:r>
-                        <a:rPr sz="1000" b="0" i="0">
+                        <a:rPr sz="1000" b="0" i="0" lang="pt-BR">
                           <a:solidFill>
                             <a:srgbClr val="828282"/>
                           </a:solidFill>
@@ -10727,7 +10727,7 @@
                     <a:p>
                       <a:pPr algn="l"/>
                       <a:r>
-                        <a:rPr sz="1000" b="0" i="0">
+                        <a:rPr sz="1000" b="0" i="0" lang="pt-BR">
                           <a:solidFill>
                             <a:srgbClr val="828282"/>
                           </a:solidFill>
@@ -10770,7 +10770,7 @@
                     <a:p>
                       <a:pPr algn="l"/>
                       <a:r>
-                        <a:rPr sz="1000" b="0" i="0">
+                        <a:rPr sz="1000" b="0" i="0" lang="pt-BR">
                           <a:solidFill>
                             <a:srgbClr val="828282"/>
                           </a:solidFill>
@@ -10815,7 +10815,7 @@
                     <a:p>
                       <a:pPr algn="l"/>
                       <a:r>
-                        <a:rPr sz="950" b="1" i="0">
+                        <a:rPr sz="950" b="1" i="0" lang="pt-BR">
                           <a:solidFill>
                             <a:srgbClr val="757575"/>
                           </a:solidFill>
@@ -10850,7 +10850,7 @@
                     <a:p>
                       <a:pPr algn="l"/>
                       <a:r>
-                        <a:rPr sz="1000" b="1" i="0">
+                        <a:rPr sz="1000" b="1" i="0" lang="pt-BR">
                           <a:solidFill>
                             <a:srgbClr val="333333"/>
                           </a:solidFill>
@@ -10859,7 +10859,7 @@
                         <a:t>Entendimento das situações de troca de veículo (trade-in)</a:t>
                       </a:r>
                       <a:r>
-                        <a:rPr sz="1000" b="0" i="0">
+                        <a:rPr sz="1000" b="0" i="0" lang="pt-BR">
                           <a:solidFill>
                             <a:srgbClr val="333333"/>
                           </a:solidFill>
@@ -10894,7 +10894,7 @@
                     <a:p>
                       <a:pPr algn="l"/>
                       <a:r>
-                        <a:rPr sz="1000" b="0" i="0">
+                        <a:rPr sz="1000" b="0" i="0" lang="pt-BR">
                           <a:solidFill>
                             <a:srgbClr val="333333"/>
                           </a:solidFill>
@@ -10929,7 +10929,7 @@
                     <a:p>
                       <a:pPr algn="l"/>
                       <a:r>
-                        <a:rPr sz="1000" b="0" i="0">
+                        <a:rPr sz="1000" b="0" i="0" lang="pt-BR">
                           <a:solidFill>
                             <a:srgbClr val="6B6B6B"/>
                           </a:solidFill>
@@ -10964,7 +10964,7 @@
                     <a:p>
                       <a:pPr algn="ctr"/>
                       <a:r>
-                        <a:rPr sz="850" b="1" i="0">
+                        <a:rPr sz="850" b="1" i="0" lang="pt-BR">
                           <a:solidFill>
                             <a:srgbClr val="A30000"/>
                           </a:solidFill>
@@ -11007,7 +11007,7 @@
                     <a:p>
                       <a:pPr algn="l"/>
                       <a:r>
-                        <a:rPr sz="1000" b="0" i="0">
+                        <a:rPr sz="1000" b="0" i="0" lang="pt-BR">
                           <a:solidFill>
                             <a:srgbClr val="828282"/>
                           </a:solidFill>
@@ -11050,7 +11050,7 @@
                     <a:p>
                       <a:pPr algn="l"/>
                       <a:r>
-                        <a:rPr sz="1000" b="0" i="0">
+                        <a:rPr sz="1000" b="0" i="0" lang="pt-BR">
                           <a:solidFill>
                             <a:srgbClr val="828282"/>
                           </a:solidFill>
@@ -11093,7 +11093,7 @@
                     <a:p>
                       <a:pPr algn="l"/>
                       <a:r>
-                        <a:rPr sz="1000" b="0" i="0">
+                        <a:rPr sz="1000" b="0" i="0" lang="pt-BR">
                           <a:solidFill>
                             <a:srgbClr val="828282"/>
                           </a:solidFill>
@@ -11138,7 +11138,7 @@
                     <a:p>
                       <a:pPr algn="l"/>
                       <a:r>
-                        <a:rPr sz="950" b="1" i="0">
+                        <a:rPr sz="950" b="1" i="0" lang="pt-BR">
                           <a:solidFill>
                             <a:srgbClr val="757575"/>
                           </a:solidFill>
@@ -11173,7 +11173,7 @@
                     <a:p>
                       <a:pPr algn="l"/>
                       <a:r>
-                        <a:rPr sz="1000" b="1" i="0">
+                        <a:rPr sz="1000" b="1" i="0" lang="pt-BR">
                           <a:solidFill>
                             <a:srgbClr val="333333"/>
                           </a:solidFill>
@@ -11182,7 +11182,7 @@
                         <a:t>Limites de interação e regras de encerramento ou transbordo</a:t>
                       </a:r>
                       <a:r>
-                        <a:rPr sz="1000" b="0" i="0">
+                        <a:rPr sz="1000" b="0" i="0" lang="pt-BR">
                           <a:solidFill>
                             <a:srgbClr val="333333"/>
                           </a:solidFill>
@@ -11217,7 +11217,7 @@
                     <a:p>
                       <a:pPr algn="l"/>
                       <a:r>
-                        <a:rPr sz="1000" b="0" i="0">
+                        <a:rPr sz="1000" b="0" i="0" lang="pt-BR">
                           <a:solidFill>
                             <a:srgbClr val="333333"/>
                           </a:solidFill>
@@ -11252,7 +11252,7 @@
                     <a:p>
                       <a:pPr algn="l"/>
                       <a:r>
-                        <a:rPr sz="1000" b="0" i="0">
+                        <a:rPr sz="1000" b="0" i="0" lang="pt-BR">
                           <a:solidFill>
                             <a:srgbClr val="6B6B6B"/>
                           </a:solidFill>
@@ -11287,7 +11287,7 @@
                     <a:p>
                       <a:pPr algn="ctr"/>
                       <a:r>
-                        <a:rPr sz="850" b="1" i="0">
+                        <a:rPr sz="850" b="1" i="0" lang="pt-BR">
                           <a:solidFill>
                             <a:srgbClr val="A30000"/>
                           </a:solidFill>
@@ -11330,7 +11330,7 @@
                     <a:p>
                       <a:pPr algn="l"/>
                       <a:r>
-                        <a:rPr sz="1000" b="0" i="0">
+                        <a:rPr sz="1000" b="0" i="0" lang="pt-BR">
                           <a:solidFill>
                             <a:srgbClr val="828282"/>
                           </a:solidFill>
@@ -11373,7 +11373,7 @@
                     <a:p>
                       <a:pPr algn="l"/>
                       <a:r>
-                        <a:rPr sz="1000" b="0" i="0">
+                        <a:rPr sz="1000" b="0" i="0" lang="pt-BR">
                           <a:solidFill>
                             <a:srgbClr val="828282"/>
                           </a:solidFill>
@@ -11416,7 +11416,7 @@
                     <a:p>
                       <a:pPr algn="l"/>
                       <a:r>
-                        <a:rPr sz="1000" b="0" i="0">
+                        <a:rPr sz="1000" b="0" i="0" lang="pt-BR">
                           <a:solidFill>
                             <a:srgbClr val="828282"/>
                           </a:solidFill>
@@ -11461,7 +11461,7 @@
                     <a:p>
                       <a:pPr algn="l"/>
                       <a:r>
-                        <a:rPr sz="950" b="1" i="0">
+                        <a:rPr sz="950" b="1" i="0" lang="pt-BR">
                           <a:solidFill>
                             <a:srgbClr val="757575"/>
                           </a:solidFill>
@@ -11496,7 +11496,7 @@
                     <a:p>
                       <a:pPr algn="l"/>
                       <a:r>
-                        <a:rPr sz="1000" b="1" i="0">
+                        <a:rPr sz="1000" b="1" i="0" lang="pt-BR">
                           <a:solidFill>
                             <a:srgbClr val="333333"/>
                           </a:solidFill>
@@ -11505,7 +11505,7 @@
                         <a:t>Integração entre Liza e atendimento humano</a:t>
                       </a:r>
                       <a:r>
-                        <a:rPr sz="1000" b="0" i="0">
+                        <a:rPr sz="1000" b="0" i="0" lang="pt-BR">
                           <a:solidFill>
                             <a:srgbClr val="333333"/>
                           </a:solidFill>
@@ -11540,7 +11540,7 @@
                     <a:p>
                       <a:pPr algn="l"/>
                       <a:r>
-                        <a:rPr sz="1000" b="0" i="0">
+                        <a:rPr sz="1000" b="0" i="0" lang="pt-BR">
                           <a:solidFill>
                             <a:srgbClr val="333333"/>
                           </a:solidFill>
@@ -11575,7 +11575,7 @@
                     <a:p>
                       <a:pPr algn="l"/>
                       <a:r>
-                        <a:rPr sz="1000" b="0" i="0">
+                        <a:rPr sz="1000" b="0" i="0" lang="pt-BR">
                           <a:solidFill>
                             <a:srgbClr val="6B6B6B"/>
                           </a:solidFill>
@@ -11610,7 +11610,7 @@
                     <a:p>
                       <a:pPr algn="ctr"/>
                       <a:r>
-                        <a:rPr sz="850" b="1" i="0">
+                        <a:rPr sz="850" b="1" i="0" lang="pt-BR">
                           <a:solidFill>
                             <a:srgbClr val="A30000"/>
                           </a:solidFill>
@@ -11653,7 +11653,7 @@
                     <a:p>
                       <a:pPr algn="l"/>
                       <a:r>
-                        <a:rPr sz="1000" b="0" i="0">
+                        <a:rPr sz="1000" b="0" i="0" lang="pt-BR">
                           <a:solidFill>
                             <a:srgbClr val="828282"/>
                           </a:solidFill>
@@ -11696,7 +11696,7 @@
                     <a:p>
                       <a:pPr algn="l"/>
                       <a:r>
-                        <a:rPr sz="1000" b="0" i="0">
+                        <a:rPr sz="1000" b="0" i="0" lang="pt-BR">
                           <a:solidFill>
                             <a:srgbClr val="828282"/>
                           </a:solidFill>
@@ -11739,7 +11739,7 @@
                     <a:p>
                       <a:pPr algn="l"/>
                       <a:r>
-                        <a:rPr sz="1000" b="0" i="0">
+                        <a:rPr sz="1000" b="0" i="0" lang="pt-BR">
                           <a:solidFill>
                             <a:srgbClr val="828282"/>
                           </a:solidFill>
@@ -11784,7 +11784,7 @@
                     <a:p>
                       <a:pPr algn="l"/>
                       <a:r>
-                        <a:rPr sz="950" b="1" i="0">
+                        <a:rPr sz="950" b="1" i="0" lang="pt-BR">
                           <a:solidFill>
                             <a:srgbClr val="757575"/>
                           </a:solidFill>
@@ -11819,7 +11819,7 @@
                     <a:p>
                       <a:pPr algn="l"/>
                       <a:r>
-                        <a:rPr sz="1000" b="1" i="0">
+                        <a:rPr sz="1000" b="1" i="0" lang="pt-BR">
                           <a:solidFill>
                             <a:srgbClr val="333333"/>
                           </a:solidFill>
@@ -11828,7 +11828,7 @@
                         <a:t>Expansão da Liza</a:t>
                       </a:r>
                       <a:r>
-                        <a:rPr sz="1000" b="0" i="0">
+                        <a:rPr sz="1000" b="0" i="0" lang="pt-BR">
                           <a:solidFill>
                             <a:srgbClr val="333333"/>
                           </a:solidFill>
@@ -11863,7 +11863,7 @@
                     <a:p>
                       <a:pPr algn="l"/>
                       <a:r>
-                        <a:rPr sz="1000" b="0" i="0">
+                        <a:rPr sz="1000" b="0" i="0" lang="pt-BR">
                           <a:solidFill>
                             <a:srgbClr val="333333"/>
                           </a:solidFill>
@@ -11898,7 +11898,7 @@
                     <a:p>
                       <a:pPr algn="l"/>
                       <a:r>
-                        <a:rPr sz="1000" b="0" i="0">
+                        <a:rPr sz="1000" b="0" i="0" lang="pt-BR">
                           <a:solidFill>
                             <a:srgbClr val="6B6B6B"/>
                           </a:solidFill>
@@ -11933,7 +11933,7 @@
                     <a:p>
                       <a:pPr algn="ctr"/>
                       <a:r>
-                        <a:rPr sz="850" b="1" i="0">
+                        <a:rPr sz="850" b="1" i="0" lang="pt-BR">
                           <a:solidFill>
                             <a:srgbClr val="A30000"/>
                           </a:solidFill>
@@ -11976,7 +11976,7 @@
                     <a:p>
                       <a:pPr algn="l"/>
                       <a:r>
-                        <a:rPr sz="1000" b="0" i="0">
+                        <a:rPr sz="1000" b="0" i="0" lang="pt-BR">
                           <a:solidFill>
                             <a:srgbClr val="828282"/>
                           </a:solidFill>
@@ -12019,7 +12019,7 @@
                     <a:p>
                       <a:pPr algn="l"/>
                       <a:r>
-                        <a:rPr sz="1000" b="0" i="0">
+                        <a:rPr sz="1000" b="0" i="0" lang="pt-BR">
                           <a:solidFill>
                             <a:srgbClr val="828282"/>
                           </a:solidFill>
@@ -12062,7 +12062,7 @@
                     <a:p>
                       <a:pPr algn="l"/>
                       <a:r>
-                        <a:rPr sz="1000" b="0" i="0">
+                        <a:rPr sz="1000" b="0" i="0" lang="pt-BR">
                           <a:solidFill>
                             <a:srgbClr val="828282"/>
                           </a:solidFill>
@@ -12107,7 +12107,7 @@
                     <a:p>
                       <a:pPr algn="l"/>
                       <a:r>
-                        <a:rPr sz="950" b="1" i="0">
+                        <a:rPr sz="950" b="1" i="0" lang="pt-BR">
                           <a:solidFill>
                             <a:srgbClr val="757575"/>
                           </a:solidFill>
@@ -12142,7 +12142,7 @@
                     <a:p>
                       <a:pPr algn="l"/>
                       <a:r>
-                        <a:rPr sz="1000" b="1" i="0">
+                        <a:rPr sz="1000" b="1" i="0" lang="pt-BR">
                           <a:solidFill>
                             <a:srgbClr val="333333"/>
                           </a:solidFill>
@@ -12151,7 +12151,7 @@
                         <a:t>Gestão de performance da Liza aprimorada</a:t>
                       </a:r>
                       <a:r>
-                        <a:rPr sz="1000" b="0" i="0">
+                        <a:rPr sz="1000" b="0" i="0" lang="pt-BR">
                           <a:solidFill>
                             <a:srgbClr val="333333"/>
                           </a:solidFill>
@@ -12186,7 +12186,7 @@
                     <a:p>
                       <a:pPr algn="l"/>
                       <a:r>
-                        <a:rPr sz="1000" b="0" i="0">
+                        <a:rPr sz="1000" b="0" i="0" lang="pt-BR">
                           <a:solidFill>
                             <a:srgbClr val="333333"/>
                           </a:solidFill>
@@ -12221,7 +12221,7 @@
                     <a:p>
                       <a:pPr algn="l"/>
                       <a:r>
-                        <a:rPr sz="1000" b="0" i="0">
+                        <a:rPr sz="1000" b="0" i="0" lang="pt-BR">
                           <a:solidFill>
                             <a:srgbClr val="6B6B6B"/>
                           </a:solidFill>
@@ -12256,7 +12256,7 @@
                     <a:p>
                       <a:pPr algn="ctr"/>
                       <a:r>
-                        <a:rPr sz="850" b="1" i="0">
+                        <a:rPr sz="850" b="1" i="0" lang="pt-BR">
                           <a:solidFill>
                             <a:srgbClr val="A30000"/>
                           </a:solidFill>
@@ -12299,7 +12299,7 @@
                     <a:p>
                       <a:pPr algn="l"/>
                       <a:r>
-                        <a:rPr sz="1000" b="0" i="0">
+                        <a:rPr sz="1000" b="0" i="0" lang="pt-BR">
                           <a:solidFill>
                             <a:srgbClr val="828282"/>
                           </a:solidFill>
@@ -12342,7 +12342,7 @@
                     <a:p>
                       <a:pPr algn="l"/>
                       <a:r>
-                        <a:rPr sz="1000" b="0" i="0">
+                        <a:rPr sz="1000" b="0" i="0" lang="pt-BR">
                           <a:solidFill>
                             <a:srgbClr val="828282"/>
                           </a:solidFill>
@@ -12385,7 +12385,7 @@
                     <a:p>
                       <a:pPr algn="l"/>
                       <a:r>
-                        <a:rPr sz="1000" b="0" i="0">
+                        <a:rPr sz="1000" b="0" i="0" lang="pt-BR">
                           <a:solidFill>
                             <a:srgbClr val="828282"/>
                           </a:solidFill>
@@ -12430,7 +12430,7 @@
                     <a:p>
                       <a:pPr algn="l"/>
                       <a:r>
-                        <a:rPr sz="950" b="1" i="0">
+                        <a:rPr sz="950" b="1" i="0" lang="pt-BR">
                           <a:solidFill>
                             <a:srgbClr val="757575"/>
                           </a:solidFill>
@@ -12465,7 +12465,7 @@
                     <a:p>
                       <a:pPr algn="l"/>
                       <a:r>
-                        <a:rPr sz="1000" b="1" i="0">
+                        <a:rPr sz="1000" b="1" i="0" lang="pt-BR">
                           <a:solidFill>
                             <a:srgbClr val="333333"/>
                           </a:solidFill>
@@ -12474,7 +12474,7 @@
                         <a:t>Ferramenta de IA consultiva implementada</a:t>
                       </a:r>
                       <a:r>
-                        <a:rPr sz="1000" b="0" i="0">
+                        <a:rPr sz="1000" b="0" i="0" lang="pt-BR">
                           <a:solidFill>
                             <a:srgbClr val="333333"/>
                           </a:solidFill>
@@ -12509,7 +12509,7 @@
                     <a:p>
                       <a:pPr algn="l"/>
                       <a:r>
-                        <a:rPr sz="1000" b="0" i="0">
+                        <a:rPr sz="1000" b="0" i="0" lang="pt-BR">
                           <a:solidFill>
                             <a:srgbClr val="333333"/>
                           </a:solidFill>
@@ -12544,7 +12544,7 @@
                     <a:p>
                       <a:pPr algn="l"/>
                       <a:r>
-                        <a:rPr sz="1000" b="0" i="0">
+                        <a:rPr sz="1000" b="0" i="0" lang="pt-BR">
                           <a:solidFill>
                             <a:srgbClr val="6B6B6B"/>
                           </a:solidFill>
@@ -12579,7 +12579,7 @@
                     <a:p>
                       <a:pPr algn="ctr"/>
                       <a:r>
-                        <a:rPr sz="850" b="1" i="0">
+                        <a:rPr sz="850" b="1" i="0" lang="pt-BR">
                           <a:solidFill>
                             <a:srgbClr val="A30000"/>
                           </a:solidFill>
@@ -12622,7 +12622,7 @@
                     <a:p>
                       <a:pPr algn="l"/>
                       <a:r>
-                        <a:rPr sz="1000" b="0" i="0">
+                        <a:rPr sz="1000" b="0" i="0" lang="pt-BR">
                           <a:solidFill>
                             <a:srgbClr val="828282"/>
                           </a:solidFill>
@@ -12665,7 +12665,7 @@
                     <a:p>
                       <a:pPr algn="l"/>
                       <a:r>
-                        <a:rPr sz="1000" b="0" i="0">
+                        <a:rPr sz="1000" b="0" i="0" lang="pt-BR">
                           <a:solidFill>
                             <a:srgbClr val="828282"/>
                           </a:solidFill>
@@ -12708,7 +12708,7 @@
                     <a:p>
                       <a:pPr algn="l"/>
                       <a:r>
-                        <a:rPr sz="1000" b="0" i="0">
+                        <a:rPr sz="1000" b="0" i="0" lang="pt-BR">
                           <a:solidFill>
                             <a:srgbClr val="828282"/>
                           </a:solidFill>
@@ -12803,7 +12803,7 @@
           <a:p>
             <a:pPr algn="ctr"/>
             <a:r>
-              <a:rPr sz="1200" b="1" i="0">
+              <a:rPr sz="1200" b="1" i="0" lang="pt-BR">
                 <a:solidFill>
                   <a:srgbClr val="1A1A1A"/>
                 </a:solidFill>
@@ -12860,7 +12860,7 @@
           <a:p>
             <a:pPr algn="l"/>
             <a:r>
-              <a:rPr sz="800" b="0" i="0">
+              <a:rPr sz="800" b="0" i="0" lang="pt-BR">
                 <a:solidFill>
                   <a:srgbClr val="757575"/>
                 </a:solidFill>
@@ -12895,7 +12895,7 @@
           <a:p>
             <a:pPr algn="r"/>
             <a:r>
-              <a:rPr sz="800" b="0" i="0">
+              <a:rPr sz="800" b="0" i="0" lang="pt-BR">
                 <a:solidFill>
                   <a:srgbClr val="757575"/>
                 </a:solidFill>
@@ -12964,7 +12964,7 @@
         </p:nvGraphicFramePr>
         <p:xfrm>
           <a:off x="384048" y="274320"/>
-          <a:ext cx="11423874" cy="853948"/>
+          <a:ext cx="11423873" cy="853948"/>
         </p:xfrm>
         <a:graphic>
           <a:graphicData uri="http://schemas.openxmlformats.org/drawingml/2006/table">
@@ -12974,7 +12974,7 @@
               </a:tblPr>
               <a:tblGrid>
                 <a:gridCol w="68580"/>
-                <a:gridCol w="6966174"/>
+                <a:gridCol w="6966173"/>
                 <a:gridCol w="1737360"/>
                 <a:gridCol w="2651760"/>
               </a:tblGrid>
@@ -13010,7 +13010,7 @@
                     <a:p>
                       <a:pPr algn="l"/>
                       <a:r>
-                        <a:rPr sz="1500" b="1" i="0">
+                        <a:rPr sz="1500" b="1" i="0" lang="pt-BR">
                           <a:solidFill>
                             <a:srgbClr val="1A1A1A"/>
                           </a:solidFill>
@@ -13026,7 +13026,7 @@
                         </a:spcBef>
                       </a:pPr>
                       <a:r>
-                        <a:rPr sz="1050" b="0" i="0">
+                        <a:rPr sz="1050" b="0" i="0" lang="pt-BR">
                           <a:solidFill>
                             <a:srgbClr val="6B6B6B"/>
                           </a:solidFill>
@@ -13035,7 +13035,7 @@
                         <a:t>Melhorar a </a:t>
                       </a:r>
                       <a:r>
-                        <a:rPr sz="1050" b="1" i="0">
+                        <a:rPr sz="1050" b="1" i="0" lang="pt-BR">
                           <a:solidFill>
                             <a:srgbClr val="6B6B6B"/>
                           </a:solidFill>
@@ -13044,7 +13044,7 @@
                         <a:t>experiência dos clientes atendidos pela Central</a:t>
                       </a:r>
                       <a:r>
-                        <a:rPr sz="1050" b="0" i="0">
+                        <a:rPr sz="1050" b="0" i="0" lang="pt-BR">
                           <a:solidFill>
                             <a:srgbClr val="6B6B6B"/>
                           </a:solidFill>
@@ -13053,7 +13053,7 @@
                         <a:t> (via transbordo da Liza ou escolha do cliente), direcioná-los à </a:t>
                       </a:r>
                       <a:r>
-                        <a:rPr sz="1050" b="1" i="0">
+                        <a:rPr sz="1050" b="1" i="0" lang="pt-BR">
                           <a:solidFill>
                             <a:srgbClr val="6B6B6B"/>
                           </a:solidFill>
@@ -13062,7 +13062,7 @@
                         <a:t>loja mais aderente</a:t>
                       </a:r>
                       <a:r>
-                        <a:rPr sz="1050" b="0" i="0">
+                        <a:rPr sz="1050" b="0" i="0" lang="pt-BR">
                           <a:solidFill>
                             <a:srgbClr val="6B6B6B"/>
                           </a:solidFill>
@@ -13071,7 +13071,7 @@
                         <a:t> e maximizar, inicialmente, a </a:t>
                       </a:r>
                       <a:r>
-                        <a:rPr sz="1050" b="1" i="0">
+                        <a:rPr sz="1050" b="1" i="0" lang="pt-BR">
                           <a:solidFill>
                             <a:srgbClr val="6B6B6B"/>
                           </a:solidFill>
@@ -13080,7 +13080,7 @@
                         <a:t>conversão em comparecimento</a:t>
                       </a:r>
                       <a:r>
-                        <a:rPr sz="1050" b="0" i="0">
+                        <a:rPr sz="1050" b="0" i="0" lang="pt-BR">
                           <a:solidFill>
                             <a:srgbClr val="6B6B6B"/>
                           </a:solidFill>
@@ -13115,7 +13115,7 @@
                     <a:p>
                       <a:pPr algn="l"/>
                       <a:r>
-                        <a:rPr sz="800" b="1" i="0">
+                        <a:rPr sz="800" b="1" i="0" lang="pt-BR">
                           <a:solidFill>
                             <a:srgbClr val="757575"/>
                           </a:solidFill>
@@ -13131,7 +13131,7 @@
                         </a:spcBef>
                       </a:pPr>
                       <a:r>
-                        <a:rPr sz="1000" b="0" i="0">
+                        <a:rPr sz="1000" b="0" i="0" lang="pt-BR">
                           <a:solidFill>
                             <a:srgbClr val="333333"/>
                           </a:solidFill>
@@ -13166,7 +13166,7 @@
                     <a:p>
                       <a:pPr algn="l"/>
                       <a:r>
-                        <a:rPr sz="800" b="1" i="0">
+                        <a:rPr sz="800" b="1" i="0" lang="pt-BR">
                           <a:solidFill>
                             <a:srgbClr val="757575"/>
                           </a:solidFill>
@@ -13182,7 +13182,7 @@
                         </a:spcBef>
                       </a:pPr>
                       <a:r>
-                        <a:rPr sz="1000" b="0" i="0">
+                        <a:rPr sz="1000" b="0" i="0" lang="pt-BR">
                           <a:solidFill>
                             <a:srgbClr val="333333"/>
                           </a:solidFill>
@@ -13241,7 +13241,7 @@
           <a:p>
             <a:pPr algn="l"/>
             <a:r>
-              <a:rPr sz="900" b="0" i="0">
+              <a:rPr sz="900" b="0" i="0" lang="pt-BR">
                 <a:solidFill>
                   <a:srgbClr val="333333"/>
                 </a:solidFill>
@@ -13250,7 +13250,7 @@
               <a:t/>
             </a:r>
             <a:r>
-              <a:rPr sz="900" b="1" i="0">
+              <a:rPr sz="900" b="1" i="0" lang="pt-BR">
                 <a:solidFill>
                   <a:srgbClr val="4A4A4A"/>
                 </a:solidFill>
@@ -13287,7 +13287,7 @@
           <a:p>
             <a:pPr algn="l"/>
             <a:r>
-              <a:rPr sz="900" b="0" i="0">
+              <a:rPr sz="900" b="0" i="0" lang="pt-BR">
                 <a:solidFill>
                   <a:srgbClr val="333333"/>
                 </a:solidFill>
@@ -13296,7 +13296,7 @@
               <a:t/>
             </a:r>
             <a:r>
-              <a:rPr sz="900" b="1" i="0">
+              <a:rPr sz="900" b="1" i="0" lang="pt-BR">
                 <a:solidFill>
                   <a:srgbClr val="4A4A4A"/>
                 </a:solidFill>
@@ -13333,7 +13333,7 @@
           <a:p>
             <a:pPr algn="l"/>
             <a:r>
-              <a:rPr sz="900" b="0" i="0">
+              <a:rPr sz="900" b="0" i="0" lang="pt-BR">
                 <a:solidFill>
                   <a:srgbClr val="333333"/>
                 </a:solidFill>
@@ -13342,7 +13342,7 @@
               <a:t/>
             </a:r>
             <a:r>
-              <a:rPr sz="900" b="1" i="0">
+              <a:rPr sz="900" b="1" i="0" lang="pt-BR">
                 <a:solidFill>
                   <a:srgbClr val="4A4A4A"/>
                 </a:solidFill>
@@ -13379,7 +13379,7 @@
           <a:p>
             <a:pPr algn="l"/>
             <a:r>
-              <a:rPr sz="900" b="0" i="0">
+              <a:rPr sz="900" b="0" i="0" lang="pt-BR">
                 <a:solidFill>
                   <a:srgbClr val="333333"/>
                 </a:solidFill>
@@ -13388,7 +13388,7 @@
               <a:t/>
             </a:r>
             <a:r>
-              <a:rPr sz="900" b="1" i="0">
+              <a:rPr sz="900" b="1" i="0" lang="pt-BR">
                 <a:solidFill>
                   <a:srgbClr val="3F7C0E"/>
                 </a:solidFill>
@@ -13425,7 +13425,7 @@
           <a:p>
             <a:pPr algn="l"/>
             <a:r>
-              <a:rPr sz="900" b="0" i="0">
+              <a:rPr sz="900" b="0" i="0" lang="pt-BR">
                 <a:solidFill>
                   <a:srgbClr val="333333"/>
                 </a:solidFill>
@@ -13434,7 +13434,7 @@
               <a:t/>
             </a:r>
             <a:r>
-              <a:rPr sz="900" b="1" i="0">
+              <a:rPr sz="900" b="1" i="0" lang="pt-BR">
                 <a:solidFill>
                   <a:srgbClr val="4A4A4A"/>
                 </a:solidFill>
@@ -13471,7 +13471,7 @@
           <a:p>
             <a:pPr algn="l"/>
             <a:r>
-              <a:rPr sz="900" b="0" i="0">
+              <a:rPr sz="900" b="0" i="0" lang="pt-BR">
                 <a:solidFill>
                   <a:srgbClr val="333333"/>
                 </a:solidFill>
@@ -13480,7 +13480,7 @@
               <a:t/>
             </a:r>
             <a:r>
-              <a:rPr sz="900" b="1" i="0">
+              <a:rPr sz="900" b="1" i="0" lang="pt-BR">
                 <a:solidFill>
                   <a:srgbClr val="4A4A4A"/>
                 </a:solidFill>
@@ -13515,7 +13515,7 @@
           <a:p>
             <a:pPr algn="l"/>
             <a:r>
-              <a:rPr sz="1150" b="1" i="0">
+              <a:rPr sz="1150" b="1" i="0" lang="pt-BR">
                 <a:solidFill>
                   <a:srgbClr val="1A1A1A"/>
                 </a:solidFill>
@@ -13536,7 +13536,7 @@
         </p:nvGraphicFramePr>
         <p:xfrm>
           <a:off x="384048" y="1839087"/>
-          <a:ext cx="11423874" cy="4653150"/>
+          <a:ext cx="11423870" cy="4653150"/>
         </p:xfrm>
         <a:graphic>
           <a:graphicData uri="http://schemas.openxmlformats.org/drawingml/2006/table">
@@ -13546,10 +13546,10 @@
               </a:tblPr>
               <a:tblGrid>
                 <a:gridCol w="567532"/>
-                <a:gridCol w="3020736"/>
-                <a:gridCol w="1299832"/>
-                <a:gridCol w="869606"/>
-                <a:gridCol w="1052681"/>
+                <a:gridCol w="3020735"/>
+                <a:gridCol w="1299831"/>
+                <a:gridCol w="869605"/>
+                <a:gridCol w="1052680"/>
                 <a:gridCol w="1537829"/>
                 <a:gridCol w="1537829"/>
                 <a:gridCol w="1537829"/>
@@ -13562,7 +13562,7 @@
                     <a:p>
                       <a:pPr algn="l"/>
                       <a:r>
-                        <a:rPr sz="900" b="1" i="0">
+                        <a:rPr sz="900" b="1" i="0" lang="pt-BR">
                           <a:solidFill>
                             <a:srgbClr val="757575"/>
                           </a:solidFill>
@@ -13597,7 +13597,7 @@
                     <a:p>
                       <a:pPr algn="l"/>
                       <a:r>
-                        <a:rPr sz="900" b="1" i="0">
+                        <a:rPr sz="900" b="1" i="0" lang="pt-BR">
                           <a:solidFill>
                             <a:srgbClr val="757575"/>
                           </a:solidFill>
@@ -13632,7 +13632,7 @@
                     <a:p>
                       <a:pPr algn="l"/>
                       <a:r>
-                        <a:rPr sz="900" b="1" i="0">
+                        <a:rPr sz="900" b="1" i="0" lang="pt-BR">
                           <a:solidFill>
                             <a:srgbClr val="757575"/>
                           </a:solidFill>
@@ -13667,7 +13667,7 @@
                     <a:p>
                       <a:pPr algn="l"/>
                       <a:r>
-                        <a:rPr sz="900" b="1" i="0">
+                        <a:rPr sz="900" b="1" i="0" lang="pt-BR">
                           <a:solidFill>
                             <a:srgbClr val="757575"/>
                           </a:solidFill>
@@ -13702,7 +13702,7 @@
                     <a:p>
                       <a:pPr algn="ctr"/>
                       <a:r>
-                        <a:rPr sz="900" b="1" i="0">
+                        <a:rPr sz="900" b="1" i="0" lang="pt-BR">
                           <a:solidFill>
                             <a:srgbClr val="757575"/>
                           </a:solidFill>
@@ -13737,7 +13737,7 @@
                     <a:p>
                       <a:pPr algn="l"/>
                       <a:r>
-                        <a:rPr sz="900" b="1" i="0">
+                        <a:rPr sz="900" b="1" i="0" lang="pt-BR">
                           <a:solidFill>
                             <a:srgbClr val="757575"/>
                           </a:solidFill>
@@ -13772,7 +13772,7 @@
                     <a:p>
                       <a:pPr algn="l"/>
                       <a:r>
-                        <a:rPr sz="900" b="1" i="0">
+                        <a:rPr sz="900" b="1" i="0" lang="pt-BR">
                           <a:solidFill>
                             <a:srgbClr val="757575"/>
                           </a:solidFill>
@@ -13807,7 +13807,7 @@
                     <a:p>
                       <a:pPr algn="l"/>
                       <a:r>
-                        <a:rPr sz="900" b="1" i="0">
+                        <a:rPr sz="900" b="1" i="0" lang="pt-BR">
                           <a:solidFill>
                             <a:srgbClr val="757575"/>
                           </a:solidFill>
@@ -13844,7 +13844,7 @@
                     <a:p>
                       <a:pPr algn="l"/>
                       <a:r>
-                        <a:rPr sz="950" b="1" i="0">
+                        <a:rPr sz="950" b="1" i="0" lang="pt-BR">
                           <a:solidFill>
                             <a:srgbClr val="757575"/>
                           </a:solidFill>
@@ -13879,7 +13879,7 @@
                     <a:p>
                       <a:pPr algn="l"/>
                       <a:r>
-                        <a:rPr sz="1000" b="1" i="0">
+                        <a:rPr sz="1000" b="1" i="0" lang="pt-BR">
                           <a:solidFill>
                             <a:srgbClr val="333333"/>
                           </a:solidFill>
@@ -13914,7 +13914,7 @@
                     <a:p>
                       <a:pPr algn="l"/>
                       <a:r>
-                        <a:rPr sz="1000" b="0" i="0">
+                        <a:rPr sz="1000" b="0" i="0" lang="pt-BR">
                           <a:solidFill>
                             <a:srgbClr val="333333"/>
                           </a:solidFill>
@@ -13949,7 +13949,7 @@
                     <a:p>
                       <a:pPr algn="l"/>
                       <a:r>
-                        <a:rPr sz="1000" b="0" i="0">
+                        <a:rPr sz="1000" b="0" i="0" lang="pt-BR">
                           <a:solidFill>
                             <a:srgbClr val="6B6B6B"/>
                           </a:solidFill>
@@ -13984,7 +13984,7 @@
                     <a:p>
                       <a:pPr algn="ctr"/>
                       <a:r>
-                        <a:rPr sz="850" b="1" i="0">
+                        <a:rPr sz="850" b="1" i="0" lang="pt-BR">
                           <a:solidFill>
                             <a:srgbClr val="6B5700"/>
                           </a:solidFill>
@@ -14027,7 +14027,7 @@
                     <a:p>
                       <a:pPr algn="l"/>
                       <a:r>
-                        <a:rPr sz="1000" b="0" i="0">
+                        <a:rPr sz="1000" b="0" i="0" lang="pt-BR">
                           <a:solidFill>
                             <a:srgbClr val="828282"/>
                           </a:solidFill>
@@ -14070,7 +14070,7 @@
                     <a:p>
                       <a:pPr algn="l"/>
                       <a:r>
-                        <a:rPr sz="1000" b="0" i="0">
+                        <a:rPr sz="1000" b="0" i="0" lang="pt-BR">
                           <a:solidFill>
                             <a:srgbClr val="828282"/>
                           </a:solidFill>
@@ -14113,7 +14113,7 @@
                     <a:p>
                       <a:pPr algn="l"/>
                       <a:r>
-                        <a:rPr sz="1000" b="0" i="0">
+                        <a:rPr sz="1000" b="0" i="0" lang="pt-BR">
                           <a:solidFill>
                             <a:srgbClr val="828282"/>
                           </a:solidFill>
@@ -14158,7 +14158,7 @@
                     <a:p>
                       <a:pPr algn="l"/>
                       <a:r>
-                        <a:rPr sz="950" b="1" i="0">
+                        <a:rPr sz="950" b="1" i="0" lang="pt-BR">
                           <a:solidFill>
                             <a:srgbClr val="757575"/>
                           </a:solidFill>
@@ -14193,7 +14193,7 @@
                     <a:p>
                       <a:pPr algn="l"/>
                       <a:r>
-                        <a:rPr sz="1000" b="1" i="0">
+                        <a:rPr sz="1000" b="1" i="0" lang="pt-BR">
                           <a:solidFill>
                             <a:srgbClr val="333333"/>
                           </a:solidFill>
@@ -14202,7 +14202,7 @@
                         <a:t>Modelo de treinamento e nova rotina de gestão de performance</a:t>
                       </a:r>
                       <a:r>
-                        <a:rPr sz="1000" b="0" i="0">
+                        <a:rPr sz="1000" b="0" i="0" lang="pt-BR">
                           <a:solidFill>
                             <a:srgbClr val="333333"/>
                           </a:solidFill>
@@ -14237,7 +14237,7 @@
                     <a:p>
                       <a:pPr algn="l"/>
                       <a:r>
-                        <a:rPr sz="1000" b="0" i="0">
+                        <a:rPr sz="1000" b="0" i="0" lang="pt-BR">
                           <a:solidFill>
                             <a:srgbClr val="333333"/>
                           </a:solidFill>
@@ -14272,7 +14272,7 @@
                     <a:p>
                       <a:pPr algn="l"/>
                       <a:r>
-                        <a:rPr sz="1000" b="0" i="0">
+                        <a:rPr sz="1000" b="0" i="0" lang="pt-BR">
                           <a:solidFill>
                             <a:srgbClr val="6B6B6B"/>
                           </a:solidFill>
@@ -14307,7 +14307,7 @@
                     <a:p>
                       <a:pPr algn="ctr"/>
                       <a:r>
-                        <a:rPr sz="850" b="1" i="0">
+                        <a:rPr sz="850" b="1" i="0" lang="pt-BR">
                           <a:solidFill>
                             <a:srgbClr val="A30000"/>
                           </a:solidFill>
@@ -14350,7 +14350,7 @@
                     <a:p>
                       <a:pPr algn="l"/>
                       <a:r>
-                        <a:rPr sz="1000" b="0" i="0">
+                        <a:rPr sz="1000" b="0" i="0" lang="pt-BR">
                           <a:solidFill>
                             <a:srgbClr val="828282"/>
                           </a:solidFill>
@@ -14393,7 +14393,7 @@
                     <a:p>
                       <a:pPr algn="l"/>
                       <a:r>
-                        <a:rPr sz="1000" b="0" i="0">
+                        <a:rPr sz="1000" b="0" i="0" lang="pt-BR">
                           <a:solidFill>
                             <a:srgbClr val="828282"/>
                           </a:solidFill>
@@ -14436,7 +14436,7 @@
                     <a:p>
                       <a:pPr algn="l"/>
                       <a:r>
-                        <a:rPr sz="1000" b="0" i="0">
+                        <a:rPr sz="1000" b="0" i="0" lang="pt-BR">
                           <a:solidFill>
                             <a:srgbClr val="828282"/>
                           </a:solidFill>
@@ -14481,7 +14481,7 @@
                     <a:p>
                       <a:pPr algn="l"/>
                       <a:r>
-                        <a:rPr sz="950" b="1" i="0">
+                        <a:rPr sz="950" b="1" i="0" lang="pt-BR">
                           <a:solidFill>
                             <a:srgbClr val="757575"/>
                           </a:solidFill>
@@ -14516,7 +14516,7 @@
                     <a:p>
                       <a:pPr algn="l"/>
                       <a:r>
-                        <a:rPr sz="1000" b="1" i="0">
+                        <a:rPr sz="1000" b="1" i="0" lang="pt-BR">
                           <a:solidFill>
                             <a:srgbClr val="333333"/>
                           </a:solidFill>
@@ -14525,7 +14525,7 @@
                         <a:t>Teste com contratação de atendentes mais qualificados</a:t>
                       </a:r>
                       <a:r>
-                        <a:rPr sz="1000" b="0" i="0">
+                        <a:rPr sz="1000" b="0" i="0" lang="pt-BR">
                           <a:solidFill>
                             <a:srgbClr val="333333"/>
                           </a:solidFill>
@@ -14560,7 +14560,7 @@
                     <a:p>
                       <a:pPr algn="l"/>
                       <a:r>
-                        <a:rPr sz="1000" b="0" i="0">
+                        <a:rPr sz="1000" b="0" i="0" lang="pt-BR">
                           <a:solidFill>
                             <a:srgbClr val="333333"/>
                           </a:solidFill>
@@ -14595,7 +14595,7 @@
                     <a:p>
                       <a:pPr algn="l"/>
                       <a:r>
-                        <a:rPr sz="1000" b="0" i="0">
+                        <a:rPr sz="1000" b="0" i="0" lang="pt-BR">
                           <a:solidFill>
                             <a:srgbClr val="6B6B6B"/>
                           </a:solidFill>
@@ -14630,7 +14630,7 @@
                     <a:p>
                       <a:pPr algn="ctr"/>
                       <a:r>
-                        <a:rPr sz="850" b="1" i="0">
+                        <a:rPr sz="850" b="1" i="0" lang="pt-BR">
                           <a:solidFill>
                             <a:srgbClr val="A30000"/>
                           </a:solidFill>
@@ -14673,7 +14673,7 @@
                     <a:p>
                       <a:pPr algn="l"/>
                       <a:r>
-                        <a:rPr sz="1000" b="0" i="0">
+                        <a:rPr sz="1000" b="0" i="0" lang="pt-BR">
                           <a:solidFill>
                             <a:srgbClr val="828282"/>
                           </a:solidFill>
@@ -14716,7 +14716,7 @@
                     <a:p>
                       <a:pPr algn="l"/>
                       <a:r>
-                        <a:rPr sz="1000" b="0" i="0">
+                        <a:rPr sz="1000" b="0" i="0" lang="pt-BR">
                           <a:solidFill>
                             <a:srgbClr val="828282"/>
                           </a:solidFill>
@@ -14759,7 +14759,7 @@
                     <a:p>
                       <a:pPr algn="l"/>
                       <a:r>
-                        <a:rPr sz="1000" b="0" i="0">
+                        <a:rPr sz="1000" b="0" i="0" lang="pt-BR">
                           <a:solidFill>
                             <a:srgbClr val="828282"/>
                           </a:solidFill>
@@ -14804,7 +14804,7 @@
                     <a:p>
                       <a:pPr algn="l"/>
                       <a:r>
-                        <a:rPr sz="950" b="1" i="0">
+                        <a:rPr sz="950" b="1" i="0" lang="pt-BR">
                           <a:solidFill>
                             <a:srgbClr val="757575"/>
                           </a:solidFill>
@@ -14839,7 +14839,7 @@
                     <a:p>
                       <a:pPr algn="l"/>
                       <a:r>
-                        <a:rPr sz="1000" b="1" i="0">
+                        <a:rPr sz="1000" b="1" i="0" lang="pt-BR">
                           <a:solidFill>
                             <a:srgbClr val="333333"/>
                           </a:solidFill>
@@ -14874,7 +14874,7 @@
                     <a:p>
                       <a:pPr algn="l"/>
                       <a:r>
-                        <a:rPr sz="1000" b="0" i="0">
+                        <a:rPr sz="1000" b="0" i="0" lang="pt-BR">
                           <a:solidFill>
                             <a:srgbClr val="333333"/>
                           </a:solidFill>
@@ -14909,7 +14909,7 @@
                     <a:p>
                       <a:pPr algn="l"/>
                       <a:r>
-                        <a:rPr sz="1000" b="0" i="0">
+                        <a:rPr sz="1000" b="0" i="0" lang="pt-BR">
                           <a:solidFill>
                             <a:srgbClr val="6B6B6B"/>
                           </a:solidFill>
@@ -14944,7 +14944,7 @@
                     <a:p>
                       <a:pPr algn="ctr"/>
                       <a:r>
-                        <a:rPr sz="850" b="1" i="0">
+                        <a:rPr sz="850" b="1" i="0" lang="pt-BR">
                           <a:solidFill>
                             <a:srgbClr val="6B5700"/>
                           </a:solidFill>
@@ -14987,7 +14987,7 @@
                     <a:p>
                       <a:pPr algn="l"/>
                       <a:r>
-                        <a:rPr sz="1000" b="0" i="0">
+                        <a:rPr sz="1000" b="0" i="0" lang="pt-BR">
                           <a:solidFill>
                             <a:srgbClr val="828282"/>
                           </a:solidFill>
@@ -15030,7 +15030,7 @@
                     <a:p>
                       <a:pPr algn="l"/>
                       <a:r>
-                        <a:rPr sz="1000" b="0" i="0">
+                        <a:rPr sz="1000" b="0" i="0" lang="pt-BR">
                           <a:solidFill>
                             <a:srgbClr val="828282"/>
                           </a:solidFill>
@@ -15073,7 +15073,7 @@
                     <a:p>
                       <a:pPr algn="l"/>
                       <a:r>
-                        <a:rPr sz="1000" b="0" i="0">
+                        <a:rPr sz="1000" b="0" i="0" lang="pt-BR">
                           <a:solidFill>
                             <a:srgbClr val="828282"/>
                           </a:solidFill>
@@ -15118,7 +15118,7 @@
                     <a:p>
                       <a:pPr algn="l"/>
                       <a:r>
-                        <a:rPr sz="950" b="1" i="0">
+                        <a:rPr sz="950" b="1" i="0" lang="pt-BR">
                           <a:solidFill>
                             <a:srgbClr val="757575"/>
                           </a:solidFill>
@@ -15153,7 +15153,7 @@
                     <a:p>
                       <a:pPr algn="l"/>
                       <a:r>
-                        <a:rPr sz="1000" b="1" i="0">
+                        <a:rPr sz="1000" b="1" i="0" lang="pt-BR">
                           <a:solidFill>
                             <a:srgbClr val="333333"/>
                           </a:solidFill>
@@ -15188,7 +15188,7 @@
                     <a:p>
                       <a:pPr algn="l"/>
                       <a:r>
-                        <a:rPr sz="1000" b="0" i="0">
+                        <a:rPr sz="1000" b="0" i="0" lang="pt-BR">
                           <a:solidFill>
                             <a:srgbClr val="333333"/>
                           </a:solidFill>
@@ -15223,7 +15223,7 @@
                     <a:p>
                       <a:pPr algn="l"/>
                       <a:r>
-                        <a:rPr sz="1000" b="0" i="0">
+                        <a:rPr sz="1000" b="0" i="0" lang="pt-BR">
                           <a:solidFill>
                             <a:srgbClr val="6B6B6B"/>
                           </a:solidFill>
@@ -15258,7 +15258,7 @@
                     <a:p>
                       <a:pPr algn="ctr"/>
                       <a:r>
-                        <a:rPr sz="850" b="1" i="0">
+                        <a:rPr sz="850" b="1" i="0" lang="pt-BR">
                           <a:solidFill>
                             <a:srgbClr val="146A3D"/>
                           </a:solidFill>
@@ -15301,7 +15301,7 @@
                     <a:p>
                       <a:pPr algn="l"/>
                       <a:r>
-                        <a:rPr sz="1000" b="0" i="0">
+                        <a:rPr sz="1000" b="0" i="0" lang="pt-BR">
                           <a:solidFill>
                             <a:srgbClr val="828282"/>
                           </a:solidFill>
@@ -15344,7 +15344,7 @@
                     <a:p>
                       <a:pPr algn="l"/>
                       <a:r>
-                        <a:rPr sz="1000" b="0" i="0">
+                        <a:rPr sz="1000" b="0" i="0" lang="pt-BR">
                           <a:solidFill>
                             <a:srgbClr val="828282"/>
                           </a:solidFill>
@@ -15387,7 +15387,7 @@
                     <a:p>
                       <a:pPr algn="l"/>
                       <a:r>
-                        <a:rPr sz="1000" b="0" i="0">
+                        <a:rPr sz="1000" b="0" i="0" lang="pt-BR">
                           <a:solidFill>
                             <a:srgbClr val="828282"/>
                           </a:solidFill>
@@ -15432,7 +15432,7 @@
                     <a:p>
                       <a:pPr algn="l"/>
                       <a:r>
-                        <a:rPr sz="950" b="1" i="0">
+                        <a:rPr sz="950" b="1" i="0" lang="pt-BR">
                           <a:solidFill>
                             <a:srgbClr val="757575"/>
                           </a:solidFill>
@@ -15467,7 +15467,7 @@
                     <a:p>
                       <a:pPr algn="l"/>
                       <a:r>
-                        <a:rPr sz="1000" b="1" i="0">
+                        <a:rPr sz="1000" b="1" i="0" lang="pt-BR">
                           <a:solidFill>
                             <a:srgbClr val="333333"/>
                           </a:solidFill>
@@ -15476,7 +15476,7 @@
                         <a:t>Piloto de atendimento da Central em lojas do varejo expandido</a:t>
                       </a:r>
                       <a:r>
-                        <a:rPr sz="1000" b="0" i="0">
+                        <a:rPr sz="1000" b="0" i="0" lang="pt-BR">
                           <a:solidFill>
                             <a:srgbClr val="333333"/>
                           </a:solidFill>
@@ -15511,7 +15511,7 @@
                     <a:p>
                       <a:pPr algn="l"/>
                       <a:r>
-                        <a:rPr sz="1000" b="0" i="0">
+                        <a:rPr sz="1000" b="0" i="0" lang="pt-BR">
                           <a:solidFill>
                             <a:srgbClr val="333333"/>
                           </a:solidFill>
@@ -15546,7 +15546,7 @@
                     <a:p>
                       <a:pPr algn="l"/>
                       <a:r>
-                        <a:rPr sz="1000" b="0" i="0">
+                        <a:rPr sz="1000" b="0" i="0" lang="pt-BR">
                           <a:solidFill>
                             <a:srgbClr val="6B6B6B"/>
                           </a:solidFill>
@@ -15581,7 +15581,7 @@
                     <a:p>
                       <a:pPr algn="ctr"/>
                       <a:r>
-                        <a:rPr sz="850" b="1" i="0">
+                        <a:rPr sz="850" b="1" i="0" lang="pt-BR">
                           <a:solidFill>
                             <a:srgbClr val="A30000"/>
                           </a:solidFill>
@@ -15624,7 +15624,7 @@
                     <a:p>
                       <a:pPr algn="l"/>
                       <a:r>
-                        <a:rPr sz="1000" b="0" i="0">
+                        <a:rPr sz="1000" b="0" i="0" lang="pt-BR">
                           <a:solidFill>
                             <a:srgbClr val="828282"/>
                           </a:solidFill>
@@ -15667,7 +15667,7 @@
                     <a:p>
                       <a:pPr algn="l"/>
                       <a:r>
-                        <a:rPr sz="1000" b="0" i="0">
+                        <a:rPr sz="1000" b="0" i="0" lang="pt-BR">
                           <a:solidFill>
                             <a:srgbClr val="828282"/>
                           </a:solidFill>
@@ -15710,7 +15710,7 @@
                     <a:p>
                       <a:pPr algn="l"/>
                       <a:r>
-                        <a:rPr sz="1000" b="0" i="0">
+                        <a:rPr sz="1000" b="0" i="0" lang="pt-BR">
                           <a:solidFill>
                             <a:srgbClr val="828282"/>
                           </a:solidFill>
@@ -15805,7 +15805,7 @@
           <a:p>
             <a:pPr algn="ctr"/>
             <a:r>
-              <a:rPr sz="1200" b="1" i="0">
+              <a:rPr sz="1200" b="1" i="0" lang="pt-BR">
                 <a:solidFill>
                   <a:srgbClr val="1A1A1A"/>
                 </a:solidFill>
@@ -15862,7 +15862,7 @@
           <a:p>
             <a:pPr algn="l"/>
             <a:r>
-              <a:rPr sz="800" b="0" i="0">
+              <a:rPr sz="800" b="0" i="0" lang="pt-BR">
                 <a:solidFill>
                   <a:srgbClr val="757575"/>
                 </a:solidFill>
@@ -15897,7 +15897,7 @@
           <a:p>
             <a:pPr algn="r"/>
             <a:r>
-              <a:rPr sz="800" b="0" i="0">
+              <a:rPr sz="800" b="0" i="0" lang="pt-BR">
                 <a:solidFill>
                   <a:srgbClr val="757575"/>
                 </a:solidFill>
@@ -15966,7 +15966,7 @@
         </p:nvGraphicFramePr>
         <p:xfrm>
           <a:off x="384048" y="274320"/>
-          <a:ext cx="11423874" cy="994791"/>
+          <a:ext cx="11423873" cy="994791"/>
         </p:xfrm>
         <a:graphic>
           <a:graphicData uri="http://schemas.openxmlformats.org/drawingml/2006/table">
@@ -15976,7 +15976,7 @@
               </a:tblPr>
               <a:tblGrid>
                 <a:gridCol w="68580"/>
-                <a:gridCol w="6966174"/>
+                <a:gridCol w="6966173"/>
                 <a:gridCol w="1737360"/>
                 <a:gridCol w="2651760"/>
               </a:tblGrid>
@@ -16012,7 +16012,7 @@
                     <a:p>
                       <a:pPr algn="l"/>
                       <a:r>
-                        <a:rPr sz="1500" b="1" i="0">
+                        <a:rPr sz="1500" b="1" i="0" lang="pt-BR">
                           <a:solidFill>
                             <a:srgbClr val="1A1A1A"/>
                           </a:solidFill>
@@ -16028,7 +16028,7 @@
                         </a:spcBef>
                       </a:pPr>
                       <a:r>
-                        <a:rPr sz="1050" b="0" i="0">
+                        <a:rPr sz="1050" b="0" i="0" lang="pt-BR">
                           <a:solidFill>
                             <a:srgbClr val="6B6B6B"/>
                           </a:solidFill>
@@ -16037,7 +16037,7 @@
                         <a:t>Melhorar a </a:t>
                       </a:r>
                       <a:r>
-                        <a:rPr sz="1050" b="1" i="0">
+                        <a:rPr sz="1050" b="1" i="0" lang="pt-BR">
                           <a:solidFill>
                             <a:srgbClr val="6B6B6B"/>
                           </a:solidFill>
@@ -16046,7 +16046,7 @@
                         <a:t>experiência dos clientes</a:t>
                       </a:r>
                       <a:r>
-                        <a:rPr sz="1050" b="0" i="0">
+                        <a:rPr sz="1050" b="0" i="0" lang="pt-BR">
                           <a:solidFill>
                             <a:srgbClr val="6B6B6B"/>
                           </a:solidFill>
@@ -16055,7 +16055,7 @@
                         <a:t> nos atendimentos realizados pelos CVs e </a:t>
                       </a:r>
                       <a:r>
-                        <a:rPr sz="1050" b="1" i="0">
+                        <a:rPr sz="1050" b="1" i="0" lang="pt-BR">
                           <a:solidFill>
                             <a:srgbClr val="6B6B6B"/>
                           </a:solidFill>
@@ -16064,7 +16064,7 @@
                         <a:t>aumentar a conversão em venda</a:t>
                       </a:r>
                       <a:r>
-                        <a:rPr sz="1050" b="0" i="0">
+                        <a:rPr sz="1050" b="0" i="0" lang="pt-BR">
                           <a:solidFill>
                             <a:srgbClr val="6B6B6B"/>
                           </a:solidFill>
@@ -16073,7 +16073,7 @@
                         <a:t>, via </a:t>
                       </a:r>
                       <a:r>
-                        <a:rPr sz="1050" b="1" i="0">
+                        <a:rPr sz="1050" b="1" i="0" lang="pt-BR">
                           <a:solidFill>
                             <a:srgbClr val="6B6B6B"/>
                           </a:solidFill>
@@ -16082,7 +16082,7 @@
                         <a:t>melhores práticas de atendimento</a:t>
                       </a:r>
                       <a:r>
-                        <a:rPr sz="1050" b="0" i="0">
+                        <a:rPr sz="1050" b="0" i="0" lang="pt-BR">
                           <a:solidFill>
                             <a:srgbClr val="6B6B6B"/>
                           </a:solidFill>
@@ -16091,7 +16091,7 @@
                         <a:t>, </a:t>
                       </a:r>
                       <a:r>
-                        <a:rPr sz="1050" b="1" i="0">
+                        <a:rPr sz="1050" b="1" i="0" lang="pt-BR">
                           <a:solidFill>
                             <a:srgbClr val="6B6B6B"/>
                           </a:solidFill>
@@ -16100,7 +16100,7 @@
                         <a:t>treinamento</a:t>
                       </a:r>
                       <a:r>
-                        <a:rPr sz="1050" b="0" i="0">
+                        <a:rPr sz="1050" b="0" i="0" lang="pt-BR">
                           <a:solidFill>
                             <a:srgbClr val="6B6B6B"/>
                           </a:solidFill>
@@ -16109,7 +16109,7 @@
                         <a:t> e </a:t>
                       </a:r>
                       <a:r>
-                        <a:rPr sz="1050" b="1" i="0">
+                        <a:rPr sz="1050" b="1" i="0" lang="pt-BR">
                           <a:solidFill>
                             <a:srgbClr val="6B6B6B"/>
                           </a:solidFill>
@@ -16118,7 +16118,7 @@
                         <a:t>gestão de performance</a:t>
                       </a:r>
                       <a:r>
-                        <a:rPr sz="1050" b="0" i="0">
+                        <a:rPr sz="1050" b="0" i="0" lang="pt-BR">
                           <a:solidFill>
                             <a:srgbClr val="6B6B6B"/>
                           </a:solidFill>
@@ -16127,7 +16127,7 @@
                         <a:t> com </a:t>
                       </a:r>
                       <a:r>
-                        <a:rPr sz="1050" b="1" i="0">
+                        <a:rPr sz="1050" b="1" i="0" lang="pt-BR">
                           <a:solidFill>
                             <a:srgbClr val="6B6B6B"/>
                           </a:solidFill>
@@ -16136,7 +16136,7 @@
                         <a:t>visibilidade completa do funil</a:t>
                       </a:r>
                       <a:r>
-                        <a:rPr sz="1050" b="0" i="0">
+                        <a:rPr sz="1050" b="0" i="0" lang="pt-BR">
                           <a:solidFill>
                             <a:srgbClr val="6B6B6B"/>
                           </a:solidFill>
@@ -16171,7 +16171,7 @@
                     <a:p>
                       <a:pPr algn="l"/>
                       <a:r>
-                        <a:rPr sz="800" b="1" i="0">
+                        <a:rPr sz="800" b="1" i="0" lang="pt-BR">
                           <a:solidFill>
                             <a:srgbClr val="757575"/>
                           </a:solidFill>
@@ -16187,7 +16187,7 @@
                         </a:spcBef>
                       </a:pPr>
                       <a:r>
-                        <a:rPr sz="1000" b="0" i="0">
+                        <a:rPr sz="1000" b="0" i="0" lang="pt-BR">
                           <a:solidFill>
                             <a:srgbClr val="333333"/>
                           </a:solidFill>
@@ -16222,7 +16222,7 @@
                     <a:p>
                       <a:pPr algn="l"/>
                       <a:r>
-                        <a:rPr sz="800" b="1" i="0">
+                        <a:rPr sz="800" b="1" i="0" lang="pt-BR">
                           <a:solidFill>
                             <a:srgbClr val="757575"/>
                           </a:solidFill>
@@ -16238,7 +16238,7 @@
                         </a:spcBef>
                       </a:pPr>
                       <a:r>
-                        <a:rPr sz="1000" b="0" i="0">
+                        <a:rPr sz="1000" b="0" i="0" lang="pt-BR">
                           <a:solidFill>
                             <a:srgbClr val="333333"/>
                           </a:solidFill>
@@ -16297,7 +16297,7 @@
           <a:p>
             <a:pPr algn="l"/>
             <a:r>
-              <a:rPr sz="900" b="0" i="0">
+              <a:rPr sz="900" b="0" i="0" lang="pt-BR">
                 <a:solidFill>
                   <a:srgbClr val="333333"/>
                 </a:solidFill>
@@ -16306,7 +16306,7 @@
               <a:t/>
             </a:r>
             <a:r>
-              <a:rPr sz="900" b="1" i="0">
+              <a:rPr sz="900" b="1" i="0" lang="pt-BR">
                 <a:solidFill>
                   <a:srgbClr val="4A4A4A"/>
                 </a:solidFill>
@@ -16343,7 +16343,7 @@
           <a:p>
             <a:pPr algn="l"/>
             <a:r>
-              <a:rPr sz="900" b="0" i="0">
+              <a:rPr sz="900" b="0" i="0" lang="pt-BR">
                 <a:solidFill>
                   <a:srgbClr val="333333"/>
                 </a:solidFill>
@@ -16352,7 +16352,7 @@
               <a:t/>
             </a:r>
             <a:r>
-              <a:rPr sz="900" b="1" i="0">
+              <a:rPr sz="900" b="1" i="0" lang="pt-BR">
                 <a:solidFill>
                   <a:srgbClr val="4A4A4A"/>
                 </a:solidFill>
@@ -16389,7 +16389,7 @@
           <a:p>
             <a:pPr algn="l"/>
             <a:r>
-              <a:rPr sz="900" b="0" i="0">
+              <a:rPr sz="900" b="0" i="0" lang="pt-BR">
                 <a:solidFill>
                   <a:srgbClr val="333333"/>
                 </a:solidFill>
@@ -16398,7 +16398,7 @@
               <a:t/>
             </a:r>
             <a:r>
-              <a:rPr sz="900" b="1" i="0">
+              <a:rPr sz="900" b="1" i="0" lang="pt-BR">
                 <a:solidFill>
                   <a:srgbClr val="4A4A4A"/>
                 </a:solidFill>
@@ -16435,7 +16435,7 @@
           <a:p>
             <a:pPr algn="l"/>
             <a:r>
-              <a:rPr sz="900" b="0" i="0">
+              <a:rPr sz="900" b="0" i="0" lang="pt-BR">
                 <a:solidFill>
                   <a:srgbClr val="333333"/>
                 </a:solidFill>
@@ -16444,7 +16444,7 @@
               <a:t/>
             </a:r>
             <a:r>
-              <a:rPr sz="900" b="1" i="0">
+              <a:rPr sz="900" b="1" i="0" lang="pt-BR">
                 <a:solidFill>
                   <a:srgbClr val="4A4A4A"/>
                 </a:solidFill>
@@ -16481,7 +16481,7 @@
           <a:p>
             <a:pPr algn="l"/>
             <a:r>
-              <a:rPr sz="900" b="0" i="0">
+              <a:rPr sz="900" b="0" i="0" lang="pt-BR">
                 <a:solidFill>
                   <a:srgbClr val="333333"/>
                 </a:solidFill>
@@ -16490,7 +16490,7 @@
               <a:t/>
             </a:r>
             <a:r>
-              <a:rPr sz="900" b="1" i="0">
+              <a:rPr sz="900" b="1" i="0" lang="pt-BR">
                 <a:solidFill>
                   <a:srgbClr val="3F7C0E"/>
                 </a:solidFill>
@@ -16527,7 +16527,7 @@
           <a:p>
             <a:pPr algn="l"/>
             <a:r>
-              <a:rPr sz="900" b="0" i="0">
+              <a:rPr sz="900" b="0" i="0" lang="pt-BR">
                 <a:solidFill>
                   <a:srgbClr val="333333"/>
                 </a:solidFill>
@@ -16536,7 +16536,7 @@
               <a:t/>
             </a:r>
             <a:r>
-              <a:rPr sz="900" b="1" i="0">
+              <a:rPr sz="900" b="1" i="0" lang="pt-BR">
                 <a:solidFill>
                   <a:srgbClr val="4A4A4A"/>
                 </a:solidFill>
@@ -16571,7 +16571,7 @@
           <a:p>
             <a:pPr algn="l"/>
             <a:r>
-              <a:rPr sz="1150" b="1" i="0">
+              <a:rPr sz="1150" b="1" i="0" lang="pt-BR">
                 <a:solidFill>
                   <a:srgbClr val="1A1A1A"/>
                 </a:solidFill>
@@ -16592,7 +16592,7 @@
         </p:nvGraphicFramePr>
         <p:xfrm>
           <a:off x="384048" y="1979930"/>
-          <a:ext cx="11423874" cy="3284982"/>
+          <a:ext cx="11423870" cy="3284982"/>
         </p:xfrm>
         <a:graphic>
           <a:graphicData uri="http://schemas.openxmlformats.org/drawingml/2006/table">
@@ -16602,10 +16602,10 @@
               </a:tblPr>
               <a:tblGrid>
                 <a:gridCol w="567532"/>
-                <a:gridCol w="3020736"/>
-                <a:gridCol w="1299832"/>
-                <a:gridCol w="869606"/>
-                <a:gridCol w="1052681"/>
+                <a:gridCol w="3020735"/>
+                <a:gridCol w="1299831"/>
+                <a:gridCol w="869605"/>
+                <a:gridCol w="1052680"/>
                 <a:gridCol w="1537829"/>
                 <a:gridCol w="1537829"/>
                 <a:gridCol w="1537829"/>
@@ -16618,7 +16618,7 @@
                     <a:p>
                       <a:pPr algn="l"/>
                       <a:r>
-                        <a:rPr sz="900" b="1" i="0">
+                        <a:rPr sz="900" b="1" i="0" lang="pt-BR">
                           <a:solidFill>
                             <a:srgbClr val="757575"/>
                           </a:solidFill>
@@ -16653,7 +16653,7 @@
                     <a:p>
                       <a:pPr algn="l"/>
                       <a:r>
-                        <a:rPr sz="900" b="1" i="0">
+                        <a:rPr sz="900" b="1" i="0" lang="pt-BR">
                           <a:solidFill>
                             <a:srgbClr val="757575"/>
                           </a:solidFill>
@@ -16688,7 +16688,7 @@
                     <a:p>
                       <a:pPr algn="l"/>
                       <a:r>
-                        <a:rPr sz="900" b="1" i="0">
+                        <a:rPr sz="900" b="1" i="0" lang="pt-BR">
                           <a:solidFill>
                             <a:srgbClr val="757575"/>
                           </a:solidFill>
@@ -16723,7 +16723,7 @@
                     <a:p>
                       <a:pPr algn="l"/>
                       <a:r>
-                        <a:rPr sz="900" b="1" i="0">
+                        <a:rPr sz="900" b="1" i="0" lang="pt-BR">
                           <a:solidFill>
                             <a:srgbClr val="757575"/>
                           </a:solidFill>
@@ -16758,7 +16758,7 @@
                     <a:p>
                       <a:pPr algn="ctr"/>
                       <a:r>
-                        <a:rPr sz="900" b="1" i="0">
+                        <a:rPr sz="900" b="1" i="0" lang="pt-BR">
                           <a:solidFill>
                             <a:srgbClr val="757575"/>
                           </a:solidFill>
@@ -16793,7 +16793,7 @@
                     <a:p>
                       <a:pPr algn="l"/>
                       <a:r>
-                        <a:rPr sz="900" b="1" i="0">
+                        <a:rPr sz="900" b="1" i="0" lang="pt-BR">
                           <a:solidFill>
                             <a:srgbClr val="757575"/>
                           </a:solidFill>
@@ -16828,7 +16828,7 @@
                     <a:p>
                       <a:pPr algn="l"/>
                       <a:r>
-                        <a:rPr sz="900" b="1" i="0">
+                        <a:rPr sz="900" b="1" i="0" lang="pt-BR">
                           <a:solidFill>
                             <a:srgbClr val="757575"/>
                           </a:solidFill>
@@ -16863,7 +16863,7 @@
                     <a:p>
                       <a:pPr algn="l"/>
                       <a:r>
-                        <a:rPr sz="900" b="1" i="0">
+                        <a:rPr sz="900" b="1" i="0" lang="pt-BR">
                           <a:solidFill>
                             <a:srgbClr val="757575"/>
                           </a:solidFill>
@@ -16900,7 +16900,7 @@
                     <a:p>
                       <a:pPr algn="l"/>
                       <a:r>
-                        <a:rPr sz="950" b="1" i="0">
+                        <a:rPr sz="950" b="1" i="0" lang="pt-BR">
                           <a:solidFill>
                             <a:srgbClr val="757575"/>
                           </a:solidFill>
@@ -16935,7 +16935,7 @@
                     <a:p>
                       <a:pPr algn="l"/>
                       <a:r>
-                        <a:rPr sz="1000" b="1" i="0">
+                        <a:rPr sz="1000" b="1" i="0" lang="pt-BR">
                           <a:solidFill>
                             <a:srgbClr val="333333"/>
                           </a:solidFill>
@@ -16944,7 +16944,7 @@
                         <a:t>Solução de atendimento via WhatsApp Business integrado ao Slack expandida</a:t>
                       </a:r>
                       <a:r>
-                        <a:rPr sz="1000" b="0" i="0">
+                        <a:rPr sz="1000" b="0" i="0" lang="pt-BR">
                           <a:solidFill>
                             <a:srgbClr val="333333"/>
                           </a:solidFill>
@@ -16953,7 +16953,7 @@
                         <a:t> para </a:t>
                       </a:r>
                       <a:r>
-                        <a:rPr sz="1000" b="1" i="0">
+                        <a:rPr sz="1000" b="1" i="0" lang="pt-BR">
                           <a:solidFill>
                             <a:srgbClr val="333333"/>
                           </a:solidFill>
@@ -16962,7 +16962,7 @@
                         <a:t>todas as lojas do varejo</a:t>
                       </a:r>
                       <a:r>
-                        <a:rPr sz="1000" b="0" i="0">
+                        <a:rPr sz="1000" b="0" i="0" lang="pt-BR">
                           <a:solidFill>
                             <a:srgbClr val="333333"/>
                           </a:solidFill>
@@ -16997,7 +16997,7 @@
                     <a:p>
                       <a:pPr algn="l"/>
                       <a:r>
-                        <a:rPr sz="1000" b="0" i="0">
+                        <a:rPr sz="1000" b="0" i="0" lang="pt-BR">
                           <a:solidFill>
                             <a:srgbClr val="333333"/>
                           </a:solidFill>
@@ -17032,7 +17032,7 @@
                     <a:p>
                       <a:pPr algn="l"/>
                       <a:r>
-                        <a:rPr sz="1000" b="0" i="0">
+                        <a:rPr sz="1000" b="0" i="0" lang="pt-BR">
                           <a:solidFill>
                             <a:srgbClr val="6B6B6B"/>
                           </a:solidFill>
@@ -17067,7 +17067,7 @@
                     <a:p>
                       <a:pPr algn="ctr"/>
                       <a:r>
-                        <a:rPr sz="850" b="1" i="0">
+                        <a:rPr sz="850" b="1" i="0" lang="pt-BR">
                           <a:solidFill>
                             <a:srgbClr val="6B5700"/>
                           </a:solidFill>
@@ -17110,7 +17110,7 @@
                     <a:p>
                       <a:pPr algn="l"/>
                       <a:r>
-                        <a:rPr sz="1000" b="0" i="0">
+                        <a:rPr sz="1000" b="0" i="0" lang="pt-BR">
                           <a:solidFill>
                             <a:srgbClr val="828282"/>
                           </a:solidFill>
@@ -17153,7 +17153,7 @@
                     <a:p>
                       <a:pPr algn="l"/>
                       <a:r>
-                        <a:rPr sz="1000" b="0" i="0">
+                        <a:rPr sz="1000" b="0" i="0" lang="pt-BR">
                           <a:solidFill>
                             <a:srgbClr val="828282"/>
                           </a:solidFill>
@@ -17196,7 +17196,7 @@
                     <a:p>
                       <a:pPr algn="l"/>
                       <a:r>
-                        <a:rPr sz="1000" b="0" i="0">
+                        <a:rPr sz="1000" b="0" i="0" lang="pt-BR">
                           <a:solidFill>
                             <a:srgbClr val="828282"/>
                           </a:solidFill>
@@ -17241,7 +17241,7 @@
                     <a:p>
                       <a:pPr algn="l"/>
                       <a:r>
-                        <a:rPr sz="950" b="1" i="0">
+                        <a:rPr sz="950" b="1" i="0" lang="pt-BR">
                           <a:solidFill>
                             <a:srgbClr val="757575"/>
                           </a:solidFill>
@@ -17276,7 +17276,7 @@
                     <a:p>
                       <a:pPr algn="l"/>
                       <a:r>
-                        <a:rPr sz="1000" b="1" i="0">
+                        <a:rPr sz="1000" b="1" i="0" lang="pt-BR">
                           <a:solidFill>
                             <a:srgbClr val="333333"/>
                           </a:solidFill>
@@ -17285,7 +17285,7 @@
                         <a:t>Inteligência de gestão da performance dos CVs implementada</a:t>
                       </a:r>
                       <a:r>
-                        <a:rPr sz="1000" b="0" i="0">
+                        <a:rPr sz="1000" b="0" i="0" lang="pt-BR">
                           <a:solidFill>
                             <a:srgbClr val="333333"/>
                           </a:solidFill>
@@ -17320,7 +17320,7 @@
                     <a:p>
                       <a:pPr algn="l"/>
                       <a:r>
-                        <a:rPr sz="1000" b="0" i="0">
+                        <a:rPr sz="1000" b="0" i="0" lang="pt-BR">
                           <a:solidFill>
                             <a:srgbClr val="333333"/>
                           </a:solidFill>
@@ -17355,7 +17355,7 @@
                     <a:p>
                       <a:pPr algn="l"/>
                       <a:r>
-                        <a:rPr sz="1000" b="0" i="0">
+                        <a:rPr sz="1000" b="0" i="0" lang="pt-BR">
                           <a:solidFill>
                             <a:srgbClr val="6B6B6B"/>
                           </a:solidFill>
@@ -17390,7 +17390,7 @@
                     <a:p>
                       <a:pPr algn="ctr"/>
                       <a:r>
-                        <a:rPr sz="850" b="1" i="0">
+                        <a:rPr sz="850" b="1" i="0" lang="pt-BR">
                           <a:solidFill>
                             <a:srgbClr val="A30000"/>
                           </a:solidFill>
@@ -17433,7 +17433,7 @@
                     <a:p>
                       <a:pPr algn="l"/>
                       <a:r>
-                        <a:rPr sz="1000" b="0" i="0">
+                        <a:rPr sz="1000" b="0" i="0" lang="pt-BR">
                           <a:solidFill>
                             <a:srgbClr val="828282"/>
                           </a:solidFill>
@@ -17476,7 +17476,7 @@
                     <a:p>
                       <a:pPr algn="l"/>
                       <a:r>
-                        <a:rPr sz="1000" b="0" i="0">
+                        <a:rPr sz="1000" b="0" i="0" lang="pt-BR">
                           <a:solidFill>
                             <a:srgbClr val="828282"/>
                           </a:solidFill>
@@ -17519,7 +17519,7 @@
                     <a:p>
                       <a:pPr algn="l"/>
                       <a:r>
-                        <a:rPr sz="1000" b="0" i="0">
+                        <a:rPr sz="1000" b="0" i="0" lang="pt-BR">
                           <a:solidFill>
                             <a:srgbClr val="828282"/>
                           </a:solidFill>
@@ -17564,7 +17564,7 @@
                     <a:p>
                       <a:pPr algn="l"/>
                       <a:r>
-                        <a:rPr sz="950" b="1" i="0">
+                        <a:rPr sz="950" b="1" i="0" lang="pt-BR">
                           <a:solidFill>
                             <a:srgbClr val="757575"/>
                           </a:solidFill>
@@ -17599,7 +17599,7 @@
                     <a:p>
                       <a:pPr algn="l"/>
                       <a:r>
-                        <a:rPr sz="1000" b="1" i="0">
+                        <a:rPr sz="1000" b="1" i="0" lang="pt-BR">
                           <a:solidFill>
                             <a:srgbClr val="333333"/>
                           </a:solidFill>
@@ -17634,7 +17634,7 @@
                     <a:p>
                       <a:pPr algn="l"/>
                       <a:r>
-                        <a:rPr sz="1000" b="0" i="0">
+                        <a:rPr sz="1000" b="0" i="0" lang="pt-BR">
                           <a:solidFill>
                             <a:srgbClr val="333333"/>
                           </a:solidFill>
@@ -17669,7 +17669,7 @@
                     <a:p>
                       <a:pPr algn="l"/>
                       <a:r>
-                        <a:rPr sz="1000" b="0" i="0">
+                        <a:rPr sz="1000" b="0" i="0" lang="pt-BR">
                           <a:solidFill>
                             <a:srgbClr val="6B6B6B"/>
                           </a:solidFill>
@@ -17704,7 +17704,7 @@
                     <a:p>
                       <a:pPr algn="ctr"/>
                       <a:r>
-                        <a:rPr sz="850" b="1" i="0">
+                        <a:rPr sz="850" b="1" i="0" lang="pt-BR">
                           <a:solidFill>
                             <a:srgbClr val="A30000"/>
                           </a:solidFill>
@@ -17747,7 +17747,7 @@
                     <a:p>
                       <a:pPr algn="l"/>
                       <a:r>
-                        <a:rPr sz="1000" b="0" i="0">
+                        <a:rPr sz="1000" b="0" i="0" lang="pt-BR">
                           <a:solidFill>
                             <a:srgbClr val="828282"/>
                           </a:solidFill>
@@ -17790,7 +17790,7 @@
                     <a:p>
                       <a:pPr algn="l"/>
                       <a:r>
-                        <a:rPr sz="1000" b="0" i="0">
+                        <a:rPr sz="1000" b="0" i="0" lang="pt-BR">
                           <a:solidFill>
                             <a:srgbClr val="828282"/>
                           </a:solidFill>
@@ -17833,7 +17833,7 @@
                     <a:p>
                       <a:pPr algn="l"/>
                       <a:r>
-                        <a:rPr sz="1000" b="0" i="0">
+                        <a:rPr sz="1000" b="0" i="0" lang="pt-BR">
                           <a:solidFill>
                             <a:srgbClr val="828282"/>
                           </a:solidFill>
@@ -17928,7 +17928,7 @@
           <a:p>
             <a:pPr algn="ctr"/>
             <a:r>
-              <a:rPr sz="1200" b="1" i="0">
+              <a:rPr sz="1200" b="1" i="0" lang="pt-BR">
                 <a:solidFill>
                   <a:srgbClr val="1A1A1A"/>
                 </a:solidFill>
@@ -17985,7 +17985,7 @@
           <a:p>
             <a:pPr algn="l"/>
             <a:r>
-              <a:rPr sz="800" b="0" i="0">
+              <a:rPr sz="800" b="0" i="0" lang="pt-BR">
                 <a:solidFill>
                   <a:srgbClr val="757575"/>
                 </a:solidFill>
@@ -18020,7 +18020,7 @@
           <a:p>
             <a:pPr algn="r"/>
             <a:r>
-              <a:rPr sz="800" b="0" i="0">
+              <a:rPr sz="800" b="0" i="0" lang="pt-BR">
                 <a:solidFill>
                   <a:srgbClr val="757575"/>
                 </a:solidFill>
@@ -18089,7 +18089,7 @@
         </p:nvGraphicFramePr>
         <p:xfrm>
           <a:off x="384048" y="274320"/>
-          <a:ext cx="11423874" cy="832104"/>
+          <a:ext cx="11423873" cy="832104"/>
         </p:xfrm>
         <a:graphic>
           <a:graphicData uri="http://schemas.openxmlformats.org/drawingml/2006/table">
@@ -18099,7 +18099,7 @@
               </a:tblPr>
               <a:tblGrid>
                 <a:gridCol w="68580"/>
-                <a:gridCol w="6966174"/>
+                <a:gridCol w="6966173"/>
                 <a:gridCol w="1737360"/>
                 <a:gridCol w="2651760"/>
               </a:tblGrid>
@@ -18135,7 +18135,7 @@
                     <a:p>
                       <a:pPr algn="l"/>
                       <a:r>
-                        <a:rPr sz="1500" b="1" i="0">
+                        <a:rPr sz="1500" b="1" i="0" lang="pt-BR">
                           <a:solidFill>
                             <a:srgbClr val="1A1A1A"/>
                           </a:solidFill>
@@ -18151,7 +18151,7 @@
                         </a:spcBef>
                       </a:pPr>
                       <a:r>
-                        <a:rPr sz="1050" b="0" i="0">
+                        <a:rPr sz="1050" b="0" i="0" lang="pt-BR">
                           <a:solidFill>
                             <a:srgbClr val="6B6B6B"/>
                           </a:solidFill>
@@ -18160,7 +18160,7 @@
                         <a:t>Aumentar a </a:t>
                       </a:r>
                       <a:r>
-                        <a:rPr sz="1050" b="1" i="0">
+                        <a:rPr sz="1050" b="1" i="0" lang="pt-BR">
                           <a:solidFill>
                             <a:srgbClr val="6B6B6B"/>
                           </a:solidFill>
@@ -18169,7 +18169,7 @@
                         <a:t>eficácia e a eficiência da geração de leads</a:t>
                       </a:r>
                       <a:r>
-                        <a:rPr sz="1050" b="0" i="0">
+                        <a:rPr sz="1050" b="0" i="0" lang="pt-BR">
                           <a:solidFill>
                             <a:srgbClr val="6B6B6B"/>
                           </a:solidFill>
@@ -18178,7 +18178,7 @@
                         <a:t>, </a:t>
                       </a:r>
                       <a:r>
-                        <a:rPr sz="1050" b="1" i="0">
+                        <a:rPr sz="1050" b="1" i="0" lang="pt-BR">
                           <a:solidFill>
                             <a:srgbClr val="6B6B6B"/>
                           </a:solidFill>
@@ -18187,7 +18187,7 @@
                         <a:t>reduzindo o CAC</a:t>
                       </a:r>
                       <a:r>
-                        <a:rPr sz="1050" b="0" i="0">
+                        <a:rPr sz="1050" b="0" i="0" lang="pt-BR">
                           <a:solidFill>
                             <a:srgbClr val="6B6B6B"/>
                           </a:solidFill>
@@ -18196,7 +18196,7 @@
                         <a:t> (geral e por região/categoria), mantendo ou aumentando o volume gerado e elevando a </a:t>
                       </a:r>
                       <a:r>
-                        <a:rPr sz="1050" b="1" i="0">
+                        <a:rPr sz="1050" b="1" i="0" lang="pt-BR">
                           <a:solidFill>
                             <a:srgbClr val="6B6B6B"/>
                           </a:solidFill>
@@ -18205,7 +18205,7 @@
                         <a:t>qualidade dos leads a um menor custo</a:t>
                       </a:r>
                       <a:r>
-                        <a:rPr sz="1050" b="0" i="0">
+                        <a:rPr sz="1050" b="0" i="0" lang="pt-BR">
                           <a:solidFill>
                             <a:srgbClr val="6B6B6B"/>
                           </a:solidFill>
@@ -18240,7 +18240,7 @@
                     <a:p>
                       <a:pPr algn="l"/>
                       <a:r>
-                        <a:rPr sz="800" b="1" i="0">
+                        <a:rPr sz="800" b="1" i="0" lang="pt-BR">
                           <a:solidFill>
                             <a:srgbClr val="757575"/>
                           </a:solidFill>
@@ -18256,7 +18256,7 @@
                         </a:spcBef>
                       </a:pPr>
                       <a:r>
-                        <a:rPr sz="1000" b="0" i="0">
+                        <a:rPr sz="1000" b="0" i="0" lang="pt-BR">
                           <a:solidFill>
                             <a:srgbClr val="333333"/>
                           </a:solidFill>
@@ -18291,7 +18291,7 @@
                     <a:p>
                       <a:pPr algn="l"/>
                       <a:r>
-                        <a:rPr sz="800" b="1" i="0">
+                        <a:rPr sz="800" b="1" i="0" lang="pt-BR">
                           <a:solidFill>
                             <a:srgbClr val="757575"/>
                           </a:solidFill>
@@ -18307,7 +18307,7 @@
                         </a:spcBef>
                       </a:pPr>
                       <a:r>
-                        <a:rPr sz="1000" b="0" i="0">
+                        <a:rPr sz="1000" b="0" i="0" lang="pt-BR">
                           <a:solidFill>
                             <a:srgbClr val="333333"/>
                           </a:solidFill>
@@ -18366,7 +18366,7 @@
           <a:p>
             <a:pPr algn="l"/>
             <a:r>
-              <a:rPr sz="900" b="0" i="0">
+              <a:rPr sz="900" b="0" i="0" lang="pt-BR">
                 <a:solidFill>
                   <a:srgbClr val="333333"/>
                 </a:solidFill>
@@ -18375,7 +18375,7 @@
               <a:t/>
             </a:r>
             <a:r>
-              <a:rPr sz="900" b="1" i="0">
+              <a:rPr sz="900" b="1" i="0" lang="pt-BR">
                 <a:solidFill>
                   <a:srgbClr val="4A4A4A"/>
                 </a:solidFill>
@@ -18412,7 +18412,7 @@
           <a:p>
             <a:pPr algn="l"/>
             <a:r>
-              <a:rPr sz="900" b="0" i="0">
+              <a:rPr sz="900" b="0" i="0" lang="pt-BR">
                 <a:solidFill>
                   <a:srgbClr val="333333"/>
                 </a:solidFill>
@@ -18421,7 +18421,7 @@
               <a:t/>
             </a:r>
             <a:r>
-              <a:rPr sz="900" b="1" i="0">
+              <a:rPr sz="900" b="1" i="0" lang="pt-BR">
                 <a:solidFill>
                   <a:srgbClr val="4A4A4A"/>
                 </a:solidFill>
@@ -18458,7 +18458,7 @@
           <a:p>
             <a:pPr algn="l"/>
             <a:r>
-              <a:rPr sz="900" b="0" i="0">
+              <a:rPr sz="900" b="0" i="0" lang="pt-BR">
                 <a:solidFill>
                   <a:srgbClr val="333333"/>
                 </a:solidFill>
@@ -18467,7 +18467,7 @@
               <a:t/>
             </a:r>
             <a:r>
-              <a:rPr sz="900" b="1" i="0">
+              <a:rPr sz="900" b="1" i="0" lang="pt-BR">
                 <a:solidFill>
                   <a:srgbClr val="4A4A4A"/>
                 </a:solidFill>
@@ -18504,7 +18504,7 @@
           <a:p>
             <a:pPr algn="l"/>
             <a:r>
-              <a:rPr sz="900" b="0" i="0">
+              <a:rPr sz="900" b="0" i="0" lang="pt-BR">
                 <a:solidFill>
                   <a:srgbClr val="333333"/>
                 </a:solidFill>
@@ -18513,7 +18513,7 @@
               <a:t/>
             </a:r>
             <a:r>
-              <a:rPr sz="900" b="1" i="0">
+              <a:rPr sz="900" b="1" i="0" lang="pt-BR">
                 <a:solidFill>
                   <a:srgbClr val="4A4A4A"/>
                 </a:solidFill>
@@ -18550,7 +18550,7 @@
           <a:p>
             <a:pPr algn="l"/>
             <a:r>
-              <a:rPr sz="900" b="0" i="0">
+              <a:rPr sz="900" b="0" i="0" lang="pt-BR">
                 <a:solidFill>
                   <a:srgbClr val="333333"/>
                 </a:solidFill>
@@ -18559,7 +18559,7 @@
               <a:t/>
             </a:r>
             <a:r>
-              <a:rPr sz="900" b="1" i="0">
+              <a:rPr sz="900" b="1" i="0" lang="pt-BR">
                 <a:solidFill>
                   <a:srgbClr val="4A4A4A"/>
                 </a:solidFill>
@@ -18596,7 +18596,7 @@
           <a:p>
             <a:pPr algn="l"/>
             <a:r>
-              <a:rPr sz="900" b="0" i="0">
+              <a:rPr sz="900" b="0" i="0" lang="pt-BR">
                 <a:solidFill>
                   <a:srgbClr val="333333"/>
                 </a:solidFill>
@@ -18605,7 +18605,7 @@
               <a:t/>
             </a:r>
             <a:r>
-              <a:rPr sz="900" b="1" i="0">
+              <a:rPr sz="900" b="1" i="0" lang="pt-BR">
                 <a:solidFill>
                   <a:srgbClr val="3F7C0E"/>
                 </a:solidFill>
@@ -18640,7 +18640,7 @@
           <a:p>
             <a:pPr algn="l"/>
             <a:r>
-              <a:rPr sz="1150" b="1" i="0">
+              <a:rPr sz="1150" b="1" i="0" lang="pt-BR">
                 <a:solidFill>
                   <a:srgbClr val="1A1A1A"/>
                 </a:solidFill>
@@ -18661,7 +18661,7 @@
         </p:nvGraphicFramePr>
         <p:xfrm>
           <a:off x="384048" y="1817243"/>
-          <a:ext cx="11423874" cy="4674999"/>
+          <a:ext cx="11423870" cy="4674999"/>
         </p:xfrm>
         <a:graphic>
           <a:graphicData uri="http://schemas.openxmlformats.org/drawingml/2006/table">
@@ -18671,10 +18671,10 @@
               </a:tblPr>
               <a:tblGrid>
                 <a:gridCol w="567532"/>
-                <a:gridCol w="3020736"/>
-                <a:gridCol w="1299832"/>
-                <a:gridCol w="869606"/>
-                <a:gridCol w="1052681"/>
+                <a:gridCol w="3020735"/>
+                <a:gridCol w="1299831"/>
+                <a:gridCol w="869605"/>
+                <a:gridCol w="1052680"/>
                 <a:gridCol w="1537829"/>
                 <a:gridCol w="1537829"/>
                 <a:gridCol w="1537829"/>
@@ -18687,7 +18687,7 @@
                     <a:p>
                       <a:pPr algn="l"/>
                       <a:r>
-                        <a:rPr sz="900" b="1" i="0">
+                        <a:rPr sz="900" b="1" i="0" lang="pt-BR">
                           <a:solidFill>
                             <a:srgbClr val="757575"/>
                           </a:solidFill>
@@ -18722,7 +18722,7 @@
                     <a:p>
                       <a:pPr algn="l"/>
                       <a:r>
-                        <a:rPr sz="900" b="1" i="0">
+                        <a:rPr sz="900" b="1" i="0" lang="pt-BR">
                           <a:solidFill>
                             <a:srgbClr val="757575"/>
                           </a:solidFill>
@@ -18757,7 +18757,7 @@
                     <a:p>
                       <a:pPr algn="l"/>
                       <a:r>
-                        <a:rPr sz="900" b="1" i="0">
+                        <a:rPr sz="900" b="1" i="0" lang="pt-BR">
                           <a:solidFill>
                             <a:srgbClr val="757575"/>
                           </a:solidFill>
@@ -18792,7 +18792,7 @@
                     <a:p>
                       <a:pPr algn="l"/>
                       <a:r>
-                        <a:rPr sz="900" b="1" i="0">
+                        <a:rPr sz="900" b="1" i="0" lang="pt-BR">
                           <a:solidFill>
                             <a:srgbClr val="757575"/>
                           </a:solidFill>
@@ -18827,7 +18827,7 @@
                     <a:p>
                       <a:pPr algn="ctr"/>
                       <a:r>
-                        <a:rPr sz="900" b="1" i="0">
+                        <a:rPr sz="900" b="1" i="0" lang="pt-BR">
                           <a:solidFill>
                             <a:srgbClr val="757575"/>
                           </a:solidFill>
@@ -18862,7 +18862,7 @@
                     <a:p>
                       <a:pPr algn="l"/>
                       <a:r>
-                        <a:rPr sz="900" b="1" i="0">
+                        <a:rPr sz="900" b="1" i="0" lang="pt-BR">
                           <a:solidFill>
                             <a:srgbClr val="757575"/>
                           </a:solidFill>
@@ -18897,7 +18897,7 @@
                     <a:p>
                       <a:pPr algn="l"/>
                       <a:r>
-                        <a:rPr sz="900" b="1" i="0">
+                        <a:rPr sz="900" b="1" i="0" lang="pt-BR">
                           <a:solidFill>
                             <a:srgbClr val="757575"/>
                           </a:solidFill>
@@ -18932,7 +18932,7 @@
                     <a:p>
                       <a:pPr algn="l"/>
                       <a:r>
-                        <a:rPr sz="900" b="1" i="0">
+                        <a:rPr sz="900" b="1" i="0" lang="pt-BR">
                           <a:solidFill>
                             <a:srgbClr val="757575"/>
                           </a:solidFill>
@@ -18969,7 +18969,7 @@
                     <a:p>
                       <a:pPr algn="l"/>
                       <a:r>
-                        <a:rPr sz="750" b="1" i="0">
+                        <a:rPr sz="750" b="1" i="0" lang="pt-BR">
                           <a:solidFill>
                             <a:srgbClr val="757575"/>
                           </a:solidFill>
@@ -19004,7 +19004,7 @@
                     <a:p>
                       <a:pPr algn="l"/>
                       <a:r>
-                        <a:rPr sz="800" b="1" i="0">
+                        <a:rPr sz="800" b="1" i="0" lang="pt-BR">
                           <a:solidFill>
                             <a:srgbClr val="333333"/>
                           </a:solidFill>
@@ -19039,7 +19039,7 @@
                     <a:p>
                       <a:pPr algn="l"/>
                       <a:r>
-                        <a:rPr sz="800" b="0" i="0">
+                        <a:rPr sz="800" b="0" i="0" lang="pt-BR">
                           <a:solidFill>
                             <a:srgbClr val="333333"/>
                           </a:solidFill>
@@ -19074,7 +19074,7 @@
                     <a:p>
                       <a:pPr algn="l"/>
                       <a:r>
-                        <a:rPr sz="800" b="0" i="0">
+                        <a:rPr sz="800" b="0" i="0" lang="pt-BR">
                           <a:solidFill>
                             <a:srgbClr val="6B6B6B"/>
                           </a:solidFill>
@@ -19109,7 +19109,7 @@
                     <a:p>
                       <a:pPr algn="ctr"/>
                       <a:r>
-                        <a:rPr sz="800" b="1" i="0">
+                        <a:rPr sz="800" b="1" i="0" lang="pt-BR">
                           <a:solidFill>
                             <a:srgbClr val="A30000"/>
                           </a:solidFill>
@@ -19152,7 +19152,7 @@
                     <a:p>
                       <a:pPr algn="l"/>
                       <a:r>
-                        <a:rPr sz="800" b="0" i="0">
+                        <a:rPr sz="800" b="0" i="0" lang="pt-BR">
                           <a:solidFill>
                             <a:srgbClr val="828282"/>
                           </a:solidFill>
@@ -19195,7 +19195,7 @@
                     <a:p>
                       <a:pPr algn="l"/>
                       <a:r>
-                        <a:rPr sz="800" b="0" i="0">
+                        <a:rPr sz="800" b="0" i="0" lang="pt-BR">
                           <a:solidFill>
                             <a:srgbClr val="828282"/>
                           </a:solidFill>
@@ -19238,7 +19238,7 @@
                     <a:p>
                       <a:pPr algn="l"/>
                       <a:r>
-                        <a:rPr sz="800" b="0" i="0">
+                        <a:rPr sz="800" b="0" i="0" lang="pt-BR">
                           <a:solidFill>
                             <a:srgbClr val="828282"/>
                           </a:solidFill>
@@ -19283,7 +19283,7 @@
                     <a:p>
                       <a:pPr algn="l"/>
                       <a:r>
-                        <a:rPr sz="750" b="1" i="0">
+                        <a:rPr sz="750" b="1" i="0" lang="pt-BR">
                           <a:solidFill>
                             <a:srgbClr val="757575"/>
                           </a:solidFill>
@@ -19318,7 +19318,7 @@
                     <a:p>
                       <a:pPr algn="l"/>
                       <a:r>
-                        <a:rPr sz="800" b="1" i="0">
+                        <a:rPr sz="800" b="1" i="0" lang="pt-BR">
                           <a:solidFill>
                             <a:srgbClr val="333333"/>
                           </a:solidFill>
@@ -19353,7 +19353,7 @@
                     <a:p>
                       <a:pPr algn="l"/>
                       <a:r>
-                        <a:rPr sz="800" b="0" i="0">
+                        <a:rPr sz="800" b="0" i="0" lang="pt-BR">
                           <a:solidFill>
                             <a:srgbClr val="333333"/>
                           </a:solidFill>
@@ -19388,7 +19388,7 @@
                     <a:p>
                       <a:pPr algn="l"/>
                       <a:r>
-                        <a:rPr sz="800" b="0" i="0">
+                        <a:rPr sz="800" b="0" i="0" lang="pt-BR">
                           <a:solidFill>
                             <a:srgbClr val="6B6B6B"/>
                           </a:solidFill>
@@ -19423,7 +19423,7 @@
                     <a:p>
                       <a:pPr algn="ctr"/>
                       <a:r>
-                        <a:rPr sz="800" b="1" i="0">
+                        <a:rPr sz="800" b="1" i="0" lang="pt-BR">
                           <a:solidFill>
                             <a:srgbClr val="A30000"/>
                           </a:solidFill>
@@ -19466,7 +19466,7 @@
                     <a:p>
                       <a:pPr algn="l"/>
                       <a:r>
-                        <a:rPr sz="800" b="0" i="0">
+                        <a:rPr sz="800" b="0" i="0" lang="pt-BR">
                           <a:solidFill>
                             <a:srgbClr val="828282"/>
                           </a:solidFill>
@@ -19509,7 +19509,7 @@
                     <a:p>
                       <a:pPr algn="l"/>
                       <a:r>
-                        <a:rPr sz="800" b="0" i="0">
+                        <a:rPr sz="800" b="0" i="0" lang="pt-BR">
                           <a:solidFill>
                             <a:srgbClr val="828282"/>
                           </a:solidFill>
@@ -19552,7 +19552,7 @@
                     <a:p>
                       <a:pPr algn="l"/>
                       <a:r>
-                        <a:rPr sz="800" b="0" i="0">
+                        <a:rPr sz="800" b="0" i="0" lang="pt-BR">
                           <a:solidFill>
                             <a:srgbClr val="828282"/>
                           </a:solidFill>
@@ -19597,7 +19597,7 @@
                     <a:p>
                       <a:pPr algn="l"/>
                       <a:r>
-                        <a:rPr sz="750" b="1" i="0">
+                        <a:rPr sz="750" b="1" i="0" lang="pt-BR">
                           <a:solidFill>
                             <a:srgbClr val="757575"/>
                           </a:solidFill>
@@ -19632,7 +19632,7 @@
                     <a:p>
                       <a:pPr algn="l"/>
                       <a:r>
-                        <a:rPr sz="800" b="1" i="0">
+                        <a:rPr sz="800" b="1" i="0" lang="pt-BR">
                           <a:solidFill>
                             <a:srgbClr val="333333"/>
                           </a:solidFill>
@@ -19667,7 +19667,7 @@
                     <a:p>
                       <a:pPr algn="l"/>
                       <a:r>
-                        <a:rPr sz="800" b="0" i="0">
+                        <a:rPr sz="800" b="0" i="0" lang="pt-BR">
                           <a:solidFill>
                             <a:srgbClr val="333333"/>
                           </a:solidFill>
@@ -19702,7 +19702,7 @@
                     <a:p>
                       <a:pPr algn="l"/>
                       <a:r>
-                        <a:rPr sz="800" b="0" i="0">
+                        <a:rPr sz="800" b="0" i="0" lang="pt-BR">
                           <a:solidFill>
                             <a:srgbClr val="6B6B6B"/>
                           </a:solidFill>
@@ -19737,7 +19737,7 @@
                     <a:p>
                       <a:pPr algn="ctr"/>
                       <a:r>
-                        <a:rPr sz="800" b="1" i="0">
+                        <a:rPr sz="800" b="1" i="0" lang="pt-BR">
                           <a:solidFill>
                             <a:srgbClr val="6B5700"/>
                           </a:solidFill>
@@ -19780,7 +19780,7 @@
                     <a:p>
                       <a:pPr algn="l"/>
                       <a:r>
-                        <a:rPr sz="800" b="0" i="0">
+                        <a:rPr sz="800" b="0" i="0" lang="pt-BR">
                           <a:solidFill>
                             <a:srgbClr val="828282"/>
                           </a:solidFill>
@@ -19823,7 +19823,7 @@
                     <a:p>
                       <a:pPr algn="l"/>
                       <a:r>
-                        <a:rPr sz="800" b="0" i="0">
+                        <a:rPr sz="800" b="0" i="0" lang="pt-BR">
                           <a:solidFill>
                             <a:srgbClr val="828282"/>
                           </a:solidFill>
@@ -19866,7 +19866,7 @@
                     <a:p>
                       <a:pPr algn="l"/>
                       <a:r>
-                        <a:rPr sz="800" b="0" i="0">
+                        <a:rPr sz="800" b="0" i="0" lang="pt-BR">
                           <a:solidFill>
                             <a:srgbClr val="828282"/>
                           </a:solidFill>
@@ -19911,7 +19911,7 @@
                     <a:p>
                       <a:pPr algn="l"/>
                       <a:r>
-                        <a:rPr sz="750" b="1" i="0">
+                        <a:rPr sz="750" b="1" i="0" lang="pt-BR">
                           <a:solidFill>
                             <a:srgbClr val="757575"/>
                           </a:solidFill>
@@ -19946,7 +19946,7 @@
                     <a:p>
                       <a:pPr algn="l"/>
                       <a:r>
-                        <a:rPr sz="800" b="1" i="0">
+                        <a:rPr sz="800" b="1" i="0" lang="pt-BR">
                           <a:solidFill>
                             <a:srgbClr val="333333"/>
                           </a:solidFill>
@@ -19955,7 +19955,7 @@
                         <a:t>Diagnóstico das campanhas Google</a:t>
                       </a:r>
                       <a:r>
-                        <a:rPr sz="800" b="0" i="0">
+                        <a:rPr sz="800" b="0" i="0" lang="pt-BR">
                           <a:solidFill>
                             <a:srgbClr val="333333"/>
                           </a:solidFill>
@@ -19964,7 +19964,7 @@
                         <a:t> concluído e </a:t>
                       </a:r>
                       <a:r>
-                        <a:rPr sz="800" b="1" i="0">
+                        <a:rPr sz="800" b="1" i="0" lang="pt-BR">
                           <a:solidFill>
                             <a:srgbClr val="333333"/>
                           </a:solidFill>
@@ -19999,7 +19999,7 @@
                     <a:p>
                       <a:pPr algn="l"/>
                       <a:r>
-                        <a:rPr sz="800" b="0" i="0">
+                        <a:rPr sz="800" b="0" i="0" lang="pt-BR">
                           <a:solidFill>
                             <a:srgbClr val="333333"/>
                           </a:solidFill>
@@ -20034,7 +20034,7 @@
                     <a:p>
                       <a:pPr algn="l"/>
                       <a:r>
-                        <a:rPr sz="800" b="0" i="0">
+                        <a:rPr sz="800" b="0" i="0" lang="pt-BR">
                           <a:solidFill>
                             <a:srgbClr val="6B6B6B"/>
                           </a:solidFill>
@@ -20069,7 +20069,7 @@
                     <a:p>
                       <a:pPr algn="ctr"/>
                       <a:r>
-                        <a:rPr sz="800" b="1" i="0">
+                        <a:rPr sz="800" b="1" i="0" lang="pt-BR">
                           <a:solidFill>
                             <a:srgbClr val="6B5700"/>
                           </a:solidFill>
@@ -20112,7 +20112,7 @@
                     <a:p>
                       <a:pPr algn="l"/>
                       <a:r>
-                        <a:rPr sz="800" b="0" i="0">
+                        <a:rPr sz="800" b="0" i="0" lang="pt-BR">
                           <a:solidFill>
                             <a:srgbClr val="828282"/>
                           </a:solidFill>
@@ -20155,7 +20155,7 @@
                     <a:p>
                       <a:pPr algn="l"/>
                       <a:r>
-                        <a:rPr sz="800" b="0" i="0">
+                        <a:rPr sz="800" b="0" i="0" lang="pt-BR">
                           <a:solidFill>
                             <a:srgbClr val="828282"/>
                           </a:solidFill>
@@ -20198,7 +20198,7 @@
                     <a:p>
                       <a:pPr algn="l"/>
                       <a:r>
-                        <a:rPr sz="800" b="0" i="0">
+                        <a:rPr sz="800" b="0" i="0" lang="pt-BR">
                           <a:solidFill>
                             <a:srgbClr val="828282"/>
                           </a:solidFill>
@@ -20243,7 +20243,7 @@
                     <a:p>
                       <a:pPr algn="l"/>
                       <a:r>
-                        <a:rPr sz="750" b="1" i="0">
+                        <a:rPr sz="750" b="1" i="0" lang="pt-BR">
                           <a:solidFill>
                             <a:srgbClr val="757575"/>
                           </a:solidFill>
@@ -20278,7 +20278,7 @@
                     <a:p>
                       <a:pPr algn="l"/>
                       <a:r>
-                        <a:rPr sz="800" b="1" i="0">
+                        <a:rPr sz="800" b="1" i="0" lang="pt-BR">
                           <a:solidFill>
                             <a:srgbClr val="333333"/>
                           </a:solidFill>
@@ -20287,7 +20287,7 @@
                         <a:t>Diagnóstico das campanhas Meta</a:t>
                       </a:r>
                       <a:r>
-                        <a:rPr sz="800" b="0" i="0">
+                        <a:rPr sz="800" b="0" i="0" lang="pt-BR">
                           <a:solidFill>
                             <a:srgbClr val="333333"/>
                           </a:solidFill>
@@ -20296,7 +20296,7 @@
                         <a:t> concluído e </a:t>
                       </a:r>
                       <a:r>
-                        <a:rPr sz="800" b="1" i="0">
+                        <a:rPr sz="800" b="1" i="0" lang="pt-BR">
                           <a:solidFill>
                             <a:srgbClr val="333333"/>
                           </a:solidFill>
@@ -20331,7 +20331,7 @@
                     <a:p>
                       <a:pPr algn="l"/>
                       <a:r>
-                        <a:rPr sz="800" b="0" i="0">
+                        <a:rPr sz="800" b="0" i="0" lang="pt-BR">
                           <a:solidFill>
                             <a:srgbClr val="333333"/>
                           </a:solidFill>
@@ -20366,7 +20366,7 @@
                     <a:p>
                       <a:pPr algn="l"/>
                       <a:r>
-                        <a:rPr sz="800" b="0" i="0">
+                        <a:rPr sz="800" b="0" i="0" lang="pt-BR">
                           <a:solidFill>
                             <a:srgbClr val="6B6B6B"/>
                           </a:solidFill>
@@ -20401,7 +20401,7 @@
                     <a:p>
                       <a:pPr algn="ctr"/>
                       <a:r>
-                        <a:rPr sz="800" b="1" i="0">
+                        <a:rPr sz="800" b="1" i="0" lang="pt-BR">
                           <a:solidFill>
                             <a:srgbClr val="6B5700"/>
                           </a:solidFill>
@@ -20444,7 +20444,7 @@
                     <a:p>
                       <a:pPr algn="l"/>
                       <a:r>
-                        <a:rPr sz="800" b="0" i="0">
+                        <a:rPr sz="800" b="0" i="0" lang="pt-BR">
                           <a:solidFill>
                             <a:srgbClr val="828282"/>
                           </a:solidFill>
@@ -20487,7 +20487,7 @@
                     <a:p>
                       <a:pPr algn="l"/>
                       <a:r>
-                        <a:rPr sz="800" b="0" i="0">
+                        <a:rPr sz="800" b="0" i="0" lang="pt-BR">
                           <a:solidFill>
                             <a:srgbClr val="828282"/>
                           </a:solidFill>
@@ -20530,7 +20530,7 @@
                     <a:p>
                       <a:pPr algn="l"/>
                       <a:r>
-                        <a:rPr sz="800" b="0" i="0">
+                        <a:rPr sz="800" b="0" i="0" lang="pt-BR">
                           <a:solidFill>
                             <a:srgbClr val="828282"/>
                           </a:solidFill>
@@ -20575,7 +20575,7 @@
                     <a:p>
                       <a:pPr algn="l"/>
                       <a:r>
-                        <a:rPr sz="750" b="1" i="0">
+                        <a:rPr sz="750" b="1" i="0" lang="pt-BR">
                           <a:solidFill>
                             <a:srgbClr val="757575"/>
                           </a:solidFill>
@@ -20610,7 +20610,7 @@
                     <a:p>
                       <a:pPr algn="l"/>
                       <a:r>
-                        <a:rPr sz="800" b="1" i="0">
+                        <a:rPr sz="800" b="1" i="0" lang="pt-BR">
                           <a:solidFill>
                             <a:srgbClr val="333333"/>
                           </a:solidFill>
@@ -20619,7 +20619,7 @@
                         <a:t>Diagnóstico e revisão das demais campanhas</a:t>
                       </a:r>
                       <a:r>
-                        <a:rPr sz="800" b="0" i="0">
+                        <a:rPr sz="800" b="0" i="0" lang="pt-BR">
                           <a:solidFill>
                             <a:srgbClr val="333333"/>
                           </a:solidFill>
@@ -20654,7 +20654,7 @@
                     <a:p>
                       <a:pPr algn="l"/>
                       <a:r>
-                        <a:rPr sz="800" b="0" i="0">
+                        <a:rPr sz="800" b="0" i="0" lang="pt-BR">
                           <a:solidFill>
                             <a:srgbClr val="333333"/>
                           </a:solidFill>
@@ -20689,7 +20689,7 @@
                     <a:p>
                       <a:pPr algn="l"/>
                       <a:r>
-                        <a:rPr sz="800" b="0" i="0">
+                        <a:rPr sz="800" b="0" i="0" lang="pt-BR">
                           <a:solidFill>
                             <a:srgbClr val="6B6B6B"/>
                           </a:solidFill>
@@ -20724,7 +20724,7 @@
                     <a:p>
                       <a:pPr algn="ctr"/>
                       <a:r>
-                        <a:rPr sz="800" b="1" i="0">
+                        <a:rPr sz="800" b="1" i="0" lang="pt-BR">
                           <a:solidFill>
                             <a:srgbClr val="A30000"/>
                           </a:solidFill>
@@ -20767,7 +20767,7 @@
                     <a:p>
                       <a:pPr algn="l"/>
                       <a:r>
-                        <a:rPr sz="800" b="0" i="0">
+                        <a:rPr sz="800" b="0" i="0" lang="pt-BR">
                           <a:solidFill>
                             <a:srgbClr val="828282"/>
                           </a:solidFill>
@@ -20810,7 +20810,7 @@
                     <a:p>
                       <a:pPr algn="l"/>
                       <a:r>
-                        <a:rPr sz="800" b="0" i="0">
+                        <a:rPr sz="800" b="0" i="0" lang="pt-BR">
                           <a:solidFill>
                             <a:srgbClr val="828282"/>
                           </a:solidFill>
@@ -20853,7 +20853,7 @@
                     <a:p>
                       <a:pPr algn="l"/>
                       <a:r>
-                        <a:rPr sz="800" b="0" i="0">
+                        <a:rPr sz="800" b="0" i="0" lang="pt-BR">
                           <a:solidFill>
                             <a:srgbClr val="828282"/>
                           </a:solidFill>
@@ -20898,7 +20898,7 @@
                     <a:p>
                       <a:pPr algn="l"/>
                       <a:r>
-                        <a:rPr sz="750" b="1" i="0">
+                        <a:rPr sz="750" b="1" i="0" lang="pt-BR">
                           <a:solidFill>
                             <a:srgbClr val="757575"/>
                           </a:solidFill>
@@ -20933,7 +20933,7 @@
                     <a:p>
                       <a:pPr algn="l"/>
                       <a:r>
-                        <a:rPr sz="800" b="1" i="0">
+                        <a:rPr sz="800" b="1" i="0" lang="pt-BR">
                           <a:solidFill>
                             <a:srgbClr val="333333"/>
                           </a:solidFill>
@@ -20942,7 +20942,7 @@
                         <a:t>Novas campanhas para segmentos prioritários</a:t>
                       </a:r>
                       <a:r>
-                        <a:rPr sz="800" b="0" i="0">
+                        <a:rPr sz="800" b="0" i="0" lang="pt-BR">
                           <a:solidFill>
                             <a:srgbClr val="333333"/>
                           </a:solidFill>
@@ -20977,7 +20977,7 @@
                     <a:p>
                       <a:pPr algn="l"/>
                       <a:r>
-                        <a:rPr sz="800" b="0" i="0">
+                        <a:rPr sz="800" b="0" i="0" lang="pt-BR">
                           <a:solidFill>
                             <a:srgbClr val="333333"/>
                           </a:solidFill>
@@ -21012,7 +21012,7 @@
                     <a:p>
                       <a:pPr algn="l"/>
                       <a:r>
-                        <a:rPr sz="800" b="0" i="0">
+                        <a:rPr sz="800" b="0" i="0" lang="pt-BR">
                           <a:solidFill>
                             <a:srgbClr val="6B6B6B"/>
                           </a:solidFill>
@@ -21047,7 +21047,7 @@
                     <a:p>
                       <a:pPr algn="ctr"/>
                       <a:r>
-                        <a:rPr sz="800" b="1" i="0">
+                        <a:rPr sz="800" b="1" i="0" lang="pt-BR">
                           <a:solidFill>
                             <a:srgbClr val="A30000"/>
                           </a:solidFill>
@@ -21090,7 +21090,7 @@
                     <a:p>
                       <a:pPr algn="l"/>
                       <a:r>
-                        <a:rPr sz="800" b="0" i="0">
+                        <a:rPr sz="800" b="0" i="0" lang="pt-BR">
                           <a:solidFill>
                             <a:srgbClr val="828282"/>
                           </a:solidFill>
@@ -21133,7 +21133,7 @@
                     <a:p>
                       <a:pPr algn="l"/>
                       <a:r>
-                        <a:rPr sz="800" b="0" i="0">
+                        <a:rPr sz="800" b="0" i="0" lang="pt-BR">
                           <a:solidFill>
                             <a:srgbClr val="828282"/>
                           </a:solidFill>
@@ -21176,7 +21176,7 @@
                     <a:p>
                       <a:pPr algn="l"/>
                       <a:r>
-                        <a:rPr sz="800" b="0" i="0">
+                        <a:rPr sz="800" b="0" i="0" lang="pt-BR">
                           <a:solidFill>
                             <a:srgbClr val="828282"/>
                           </a:solidFill>
@@ -21221,7 +21221,7 @@
                     <a:p>
                       <a:pPr algn="l"/>
                       <a:r>
-                        <a:rPr sz="750" b="1" i="0">
+                        <a:rPr sz="750" b="1" i="0" lang="pt-BR">
                           <a:solidFill>
                             <a:srgbClr val="757575"/>
                           </a:solidFill>
@@ -21256,7 +21256,7 @@
                     <a:p>
                       <a:pPr algn="l"/>
                       <a:r>
-                        <a:rPr sz="800" b="1" i="0">
+                        <a:rPr sz="800" b="1" i="0" lang="pt-BR">
                           <a:solidFill>
                             <a:srgbClr val="333333"/>
                           </a:solidFill>
@@ -21291,7 +21291,7 @@
                     <a:p>
                       <a:pPr algn="l"/>
                       <a:r>
-                        <a:rPr sz="800" b="0" i="0">
+                        <a:rPr sz="800" b="0" i="0" lang="pt-BR">
                           <a:solidFill>
                             <a:srgbClr val="333333"/>
                           </a:solidFill>
@@ -21326,7 +21326,7 @@
                     <a:p>
                       <a:pPr algn="l"/>
                       <a:r>
-                        <a:rPr sz="800" b="0" i="0">
+                        <a:rPr sz="800" b="0" i="0" lang="pt-BR">
                           <a:solidFill>
                             <a:srgbClr val="6B6B6B"/>
                           </a:solidFill>
@@ -21361,7 +21361,7 @@
                     <a:p>
                       <a:pPr algn="ctr"/>
                       <a:r>
-                        <a:rPr sz="800" b="1" i="0">
+                        <a:rPr sz="800" b="1" i="0" lang="pt-BR">
                           <a:solidFill>
                             <a:srgbClr val="A30000"/>
                           </a:solidFill>
@@ -21404,7 +21404,7 @@
                     <a:p>
                       <a:pPr algn="l"/>
                       <a:r>
-                        <a:rPr sz="800" b="0" i="0">
+                        <a:rPr sz="800" b="0" i="0" lang="pt-BR">
                           <a:solidFill>
                             <a:srgbClr val="828282"/>
                           </a:solidFill>
@@ -21447,7 +21447,7 @@
                     <a:p>
                       <a:pPr algn="l"/>
                       <a:r>
-                        <a:rPr sz="800" b="0" i="0">
+                        <a:rPr sz="800" b="0" i="0" lang="pt-BR">
                           <a:solidFill>
                             <a:srgbClr val="828282"/>
                           </a:solidFill>
@@ -21490,7 +21490,7 @@
                     <a:p>
                       <a:pPr algn="l"/>
                       <a:r>
-                        <a:rPr sz="800" b="0" i="0">
+                        <a:rPr sz="800" b="0" i="0" lang="pt-BR">
                           <a:solidFill>
                             <a:srgbClr val="828282"/>
                           </a:solidFill>
@@ -21535,7 +21535,7 @@
                     <a:p>
                       <a:pPr algn="l"/>
                       <a:r>
-                        <a:rPr sz="750" b="1" i="0">
+                        <a:rPr sz="750" b="1" i="0" lang="pt-BR">
                           <a:solidFill>
                             <a:srgbClr val="757575"/>
                           </a:solidFill>
@@ -21570,7 +21570,7 @@
                     <a:p>
                       <a:pPr algn="l"/>
                       <a:r>
-                        <a:rPr sz="800" b="1" i="0">
+                        <a:rPr sz="800" b="1" i="0" lang="pt-BR">
                           <a:solidFill>
                             <a:srgbClr val="333333"/>
                           </a:solidFill>
@@ -21579,7 +21579,7 @@
                         <a:t>Ativos prioritários de conversão</a:t>
                       </a:r>
                       <a:r>
-                        <a:rPr sz="800" b="0" i="0">
+                        <a:rPr sz="800" b="0" i="0" lang="pt-BR">
                           <a:solidFill>
                             <a:srgbClr val="333333"/>
                           </a:solidFill>
@@ -21588,7 +21588,7 @@
                         <a:t> (landing pages, conteúdos, páginas de cadastro e enriquecimento) </a:t>
                       </a:r>
                       <a:r>
-                        <a:rPr sz="800" b="1" i="0">
+                        <a:rPr sz="800" b="1" i="0" lang="pt-BR">
                           <a:solidFill>
                             <a:srgbClr val="333333"/>
                           </a:solidFill>
@@ -21623,7 +21623,7 @@
                     <a:p>
                       <a:pPr algn="l"/>
                       <a:r>
-                        <a:rPr sz="800" b="0" i="0">
+                        <a:rPr sz="800" b="0" i="0" lang="pt-BR">
                           <a:solidFill>
                             <a:srgbClr val="333333"/>
                           </a:solidFill>
@@ -21658,7 +21658,7 @@
                     <a:p>
                       <a:pPr algn="l"/>
                       <a:r>
-                        <a:rPr sz="800" b="0" i="0">
+                        <a:rPr sz="800" b="0" i="0" lang="pt-BR">
                           <a:solidFill>
                             <a:srgbClr val="6B6B6B"/>
                           </a:solidFill>
@@ -21693,7 +21693,7 @@
                     <a:p>
                       <a:pPr algn="ctr"/>
                       <a:r>
-                        <a:rPr sz="800" b="1" i="0">
+                        <a:rPr sz="800" b="1" i="0" lang="pt-BR">
                           <a:solidFill>
                             <a:srgbClr val="A30000"/>
                           </a:solidFill>
@@ -21736,7 +21736,7 @@
                     <a:p>
                       <a:pPr algn="l"/>
                       <a:r>
-                        <a:rPr sz="800" b="0" i="0">
+                        <a:rPr sz="800" b="0" i="0" lang="pt-BR">
                           <a:solidFill>
                             <a:srgbClr val="828282"/>
                           </a:solidFill>
@@ -21779,7 +21779,7 @@
                     <a:p>
                       <a:pPr algn="l"/>
                       <a:r>
-                        <a:rPr sz="800" b="0" i="0">
+                        <a:rPr sz="800" b="0" i="0" lang="pt-BR">
                           <a:solidFill>
                             <a:srgbClr val="828282"/>
                           </a:solidFill>
@@ -21822,7 +21822,7 @@
                     <a:p>
                       <a:pPr algn="l"/>
                       <a:r>
-                        <a:rPr sz="800" b="0" i="0">
+                        <a:rPr sz="800" b="0" i="0" lang="pt-BR">
                           <a:solidFill>
                             <a:srgbClr val="828282"/>
                           </a:solidFill>
@@ -21867,7 +21867,7 @@
                     <a:p>
                       <a:pPr algn="l"/>
                       <a:r>
-                        <a:rPr sz="750" b="1" i="0">
+                        <a:rPr sz="750" b="1" i="0" lang="pt-BR">
                           <a:solidFill>
                             <a:srgbClr val="757575"/>
                           </a:solidFill>
@@ -21902,7 +21902,7 @@
                     <a:p>
                       <a:pPr algn="l"/>
                       <a:r>
-                        <a:rPr sz="800" b="1" i="0">
+                        <a:rPr sz="800" b="1" i="0" lang="pt-BR">
                           <a:solidFill>
                             <a:srgbClr val="333333"/>
                           </a:solidFill>
@@ -21937,7 +21937,7 @@
                     <a:p>
                       <a:pPr algn="l"/>
                       <a:r>
-                        <a:rPr sz="800" b="0" i="0">
+                        <a:rPr sz="800" b="0" i="0" lang="pt-BR">
                           <a:solidFill>
                             <a:srgbClr val="333333"/>
                           </a:solidFill>
@@ -21972,7 +21972,7 @@
                     <a:p>
                       <a:pPr algn="l"/>
                       <a:r>
-                        <a:rPr sz="800" b="0" i="0">
+                        <a:rPr sz="800" b="0" i="0" lang="pt-BR">
                           <a:solidFill>
                             <a:srgbClr val="6B6B6B"/>
                           </a:solidFill>
@@ -22007,7 +22007,7 @@
                     <a:p>
                       <a:pPr algn="ctr"/>
                       <a:r>
-                        <a:rPr sz="800" b="1" i="0">
+                        <a:rPr sz="800" b="1" i="0" lang="pt-BR">
                           <a:solidFill>
                             <a:srgbClr val="A30000"/>
                           </a:solidFill>
@@ -22050,7 +22050,7 @@
                     <a:p>
                       <a:pPr algn="l"/>
                       <a:r>
-                        <a:rPr sz="800" b="0" i="0">
+                        <a:rPr sz="800" b="0" i="0" lang="pt-BR">
                           <a:solidFill>
                             <a:srgbClr val="828282"/>
                           </a:solidFill>
@@ -22093,7 +22093,7 @@
                     <a:p>
                       <a:pPr algn="l"/>
                       <a:r>
-                        <a:rPr sz="800" b="0" i="0">
+                        <a:rPr sz="800" b="0" i="0" lang="pt-BR">
                           <a:solidFill>
                             <a:srgbClr val="828282"/>
                           </a:solidFill>
@@ -22136,7 +22136,7 @@
                     <a:p>
                       <a:pPr algn="l"/>
                       <a:r>
-                        <a:rPr sz="800" b="0" i="0">
+                        <a:rPr sz="800" b="0" i="0" lang="pt-BR">
                           <a:solidFill>
                             <a:srgbClr val="828282"/>
                           </a:solidFill>
@@ -22181,7 +22181,7 @@
                     <a:p>
                       <a:pPr algn="l"/>
                       <a:r>
-                        <a:rPr sz="750" b="1" i="0">
+                        <a:rPr sz="750" b="1" i="0" lang="pt-BR">
                           <a:solidFill>
                             <a:srgbClr val="757575"/>
                           </a:solidFill>
@@ -22216,7 +22216,7 @@
                     <a:p>
                       <a:pPr algn="l"/>
                       <a:r>
-                        <a:rPr sz="800" b="1" i="0">
+                        <a:rPr sz="800" b="1" i="0" lang="pt-BR">
                           <a:solidFill>
                             <a:srgbClr val="333333"/>
                           </a:solidFill>
@@ -22225,7 +22225,7 @@
                         <a:t>Oportunidades de geração de leads via parcerias e ativações comerciais mapeadas, priorizadas e testadas</a:t>
                       </a:r>
                       <a:r>
-                        <a:rPr sz="800" b="0" i="0">
+                        <a:rPr sz="800" b="0" i="0" lang="pt-BR">
                           <a:solidFill>
                             <a:srgbClr val="333333"/>
                           </a:solidFill>
@@ -22260,7 +22260,7 @@
                     <a:p>
                       <a:pPr algn="l"/>
                       <a:r>
-                        <a:rPr sz="800" b="0" i="0">
+                        <a:rPr sz="800" b="0" i="0" lang="pt-BR">
                           <a:solidFill>
                             <a:srgbClr val="333333"/>
                           </a:solidFill>
@@ -22295,7 +22295,7 @@
                     <a:p>
                       <a:pPr algn="l"/>
                       <a:r>
-                        <a:rPr sz="800" b="0" i="0">
+                        <a:rPr sz="800" b="0" i="0" lang="pt-BR">
                           <a:solidFill>
                             <a:srgbClr val="6B6B6B"/>
                           </a:solidFill>
@@ -22330,7 +22330,7 @@
                     <a:p>
                       <a:pPr algn="ctr"/>
                       <a:r>
-                        <a:rPr sz="800" b="1" i="0">
+                        <a:rPr sz="800" b="1" i="0" lang="pt-BR">
                           <a:solidFill>
                             <a:srgbClr val="A30000"/>
                           </a:solidFill>
@@ -22373,7 +22373,7 @@
                     <a:p>
                       <a:pPr algn="l"/>
                       <a:r>
-                        <a:rPr sz="800" b="0" i="0">
+                        <a:rPr sz="800" b="0" i="0" lang="pt-BR">
                           <a:solidFill>
                             <a:srgbClr val="828282"/>
                           </a:solidFill>
@@ -22416,7 +22416,7 @@
                     <a:p>
                       <a:pPr algn="l"/>
                       <a:r>
-                        <a:rPr sz="800" b="0" i="0">
+                        <a:rPr sz="800" b="0" i="0" lang="pt-BR">
                           <a:solidFill>
                             <a:srgbClr val="828282"/>
                           </a:solidFill>
@@ -22459,7 +22459,7 @@
                     <a:p>
                       <a:pPr algn="l"/>
                       <a:r>
-                        <a:rPr sz="800" b="0" i="0">
+                        <a:rPr sz="800" b="0" i="0" lang="pt-BR">
                           <a:solidFill>
                             <a:srgbClr val="828282"/>
                           </a:solidFill>
@@ -22554,7 +22554,7 @@
           <a:p>
             <a:pPr algn="ctr"/>
             <a:r>
-              <a:rPr sz="1200" b="1" i="0">
+              <a:rPr sz="1200" b="1" i="0" lang="pt-BR">
                 <a:solidFill>
                   <a:srgbClr val="1A1A1A"/>
                 </a:solidFill>
@@ -22611,7 +22611,7 @@
           <a:p>
             <a:pPr algn="l"/>
             <a:r>
-              <a:rPr sz="800" b="0" i="0">
+              <a:rPr sz="800" b="0" i="0" lang="pt-BR">
                 <a:solidFill>
                   <a:srgbClr val="757575"/>
                 </a:solidFill>
@@ -22646,7 +22646,7 @@
           <a:p>
             <a:pPr algn="r"/>
             <a:r>
-              <a:rPr sz="800" b="0" i="0">
+              <a:rPr sz="800" b="0" i="0" lang="pt-BR">
                 <a:solidFill>
                   <a:srgbClr val="757575"/>
                 </a:solidFill>
